--- a/icbb-website/materials/research-methods/unit-06-slides.pptx
+++ b/icbb-website/materials/research-methods/unit-06-slides.pptx
@@ -1056,7 +1056,7 @@
           <a:p>
             <a:r>
               <a:rPr lang="en-US" dirty="0"/>
-              <a:t>Take-away: Name your tradition and then live by its rules. "Grounded theory" followed by six interviews and a thematic analysis is the mismatch examiners look for first.</a:t>
+              <a:t>The point: Name your tradition and then live by its rules. "Grounded theory" followed by six interviews and a thematic analysis is the mismatch examiners look for first.</a:t>
             </a:r>
             <a:endParaRPr lang="en-US" dirty="0"/>
           </a:p>
@@ -1144,7 +1144,7 @@
           <a:p>
             <a:r>
               <a:rPr lang="en-US" dirty="0"/>
-              <a:t>Take-away: Open wide, then narrow with probes. Pilot the guide on two people — you will change it, and that is a sign the piloting worked, not that the guide was bad.</a:t>
+              <a:t>The point: Open wide, then narrow with probes. Pilot the guide on two people — you will change it, and that is a sign the piloting worked, not that the guide was bad.</a:t>
             </a:r>
             <a:endParaRPr lang="en-US" dirty="0"/>
           </a:p>
@@ -1496,7 +1496,7 @@
           <a:p>
             <a:r>
               <a:rPr lang="en-US" dirty="0"/>
-              <a:t>Read these out at the start and return to them at the end of the unit.</a:t>
+              <a:t>Read these at the start, and return to them at the end of the unit.</a:t>
             </a:r>
             <a:endParaRPr lang="en-US" dirty="0"/>
           </a:p>
@@ -2216,14 +2216,14 @@
         </p:nvSpPr>
         <p:spPr>
           <a:xfrm>
-            <a:off x="0" y="0"/>
-            <a:ext cx="118872" cy="5148072"/>
+            <a:off x="566928" y="4590288"/>
+            <a:ext cx="8010144" cy="10973"/>
           </a:xfrm>
           <a:prstGeom prst="rect">
             <a:avLst/>
           </a:prstGeom>
           <a:solidFill>
-            <a:srgbClr val="0066CC"/>
+            <a:srgbClr val="D8D3CB"/>
           </a:solidFill>
           <a:ln/>
         </p:spPr>
@@ -2238,7 +2238,7 @@
         </p:nvPicPr>
         <p:blipFill>
           <a:blip r:embed="rId1">
-            <a:alphaModFix amt="18000"/>
+            <a:alphaModFix amt="38000"/>
           </a:blip>
           <a:stretch>
             <a:fillRect/>
@@ -2246,8 +2246,8 @@
         </p:blipFill>
         <p:spPr>
           <a:xfrm>
-            <a:off x="6903720" y="3977640"/>
-            <a:ext cx="1920240" cy="1280160"/>
+            <a:off x="7973568" y="4709160"/>
+            <a:ext cx="566928" cy="374904"/>
           </a:xfrm>
           <a:prstGeom prst="rect">
             <a:avLst/>
@@ -2266,8 +2266,8 @@
         </p:nvSpPr>
         <p:spPr>
           <a:xfrm>
-            <a:off x="8503920" y="4709160"/>
-            <a:ext cx="800000" cy="300000"/>
+            <a:off x="566928" y="4700016"/>
+            <a:ext cx="914400" cy="274320"/>
           </a:xfrm>
           <a:prstGeom prst="rect">
             <a:avLst/>
@@ -2282,10 +2282,13 @@
           <a:bodyPr/>
           <a:lstStyle>
             <a:lvl1pPr>
-              <a:defRPr sz="1000">
-                <a:solidFill>
-                  <a:srgbClr val="6B7280"/>
-                </a:solidFill>
+              <a:defRPr sz="900">
+                <a:solidFill>
+                  <a:srgbClr val="5F6B76"/>
+                </a:solidFill>
+                <a:latin typeface="Corbel"/>
+                <a:ea typeface="Corbel"/>
+                <a:cs typeface="Corbel"/>
               </a:defRPr>
             </a:lvl1pPr>
           </a:lstStyle>
@@ -2313,7 +2316,7 @@
     <p:bg>
       <p:bgPr>
         <a:solidFill>
-          <a:srgbClr val="004D99"/>
+          <a:srgbClr val="132330"/>
         </a:solidFill>
       </p:bgPr>
     </p:bg>
@@ -2339,14 +2342,14 @@
         </p:nvSpPr>
         <p:spPr>
           <a:xfrm>
-            <a:off x="0" y="4526280"/>
-            <a:ext cx="9144000" cy="621792"/>
+            <a:off x="685800" y="1481328"/>
+            <a:ext cx="1051560" cy="25603"/>
           </a:xfrm>
           <a:prstGeom prst="rect">
             <a:avLst/>
           </a:prstGeom>
           <a:solidFill>
-            <a:srgbClr val="00A86B"/>
+            <a:srgbClr val="9A6A3C"/>
           </a:solidFill>
           <a:ln/>
         </p:spPr>
@@ -2361,7 +2364,7 @@
         </p:nvPicPr>
         <p:blipFill>
           <a:blip r:embed="rId1">
-            <a:alphaModFix amt="75000"/>
+            <a:alphaModFix amt="45000"/>
           </a:blip>
           <a:stretch>
             <a:fillRect/>
@@ -2369,8 +2372,8 @@
         </p:blipFill>
         <p:spPr>
           <a:xfrm>
-            <a:off x="7452360" y="384048"/>
-            <a:ext cx="1371600" cy="914400"/>
+            <a:off x="7863840" y="4315968"/>
+            <a:ext cx="676656" cy="448056"/>
           </a:xfrm>
           <a:prstGeom prst="rect">
             <a:avLst/>
@@ -2414,8 +2417,8 @@
         </p:nvSpPr>
         <p:spPr>
           <a:xfrm>
-            <a:off x="8503920" y="4709160"/>
-            <a:ext cx="800000" cy="300000"/>
+            <a:off x="566928" y="4700016"/>
+            <a:ext cx="914400" cy="274320"/>
           </a:xfrm>
           <a:prstGeom prst="rect">
             <a:avLst/>
@@ -2430,10 +2433,13 @@
           <a:bodyPr/>
           <a:lstStyle>
             <a:lvl1pPr>
-              <a:defRPr sz="1000">
-                <a:solidFill>
-                  <a:srgbClr val="6B7280"/>
-                </a:solidFill>
+              <a:defRPr sz="900">
+                <a:solidFill>
+                  <a:srgbClr val="5F6B76"/>
+                </a:solidFill>
+                <a:latin typeface="Corbel"/>
+                <a:ea typeface="Corbel"/>
+                <a:cs typeface="Corbel"/>
               </a:defRPr>
             </a:lvl1pPr>
           </a:lstStyle>
@@ -2734,8 +2740,8 @@
         </p:nvSpPr>
         <p:spPr>
           <a:xfrm>
-            <a:off x="548640" y="1005840"/>
-            <a:ext cx="6675120" cy="274320"/>
+            <a:off x="685800" y="1024128"/>
+            <a:ext cx="6766560" cy="292608"/>
           </a:xfrm>
           <a:prstGeom prst="rect">
             <a:avLst/>
@@ -2751,14 +2757,17 @@
               <a:buNone/>
             </a:pPr>
             <a:r>
-              <a:rPr lang="en-US" sz="1200" b="1" spc="200" kern="0" dirty="0">
-                <a:solidFill>
-                  <a:srgbClr val="00A86B"/>
-                </a:solidFill>
-              </a:rPr>
-              <a:t>ICBB-RM101  ·  UNIT 6 OF 10</a:t>
-            </a:r>
-            <a:endParaRPr lang="en-US" sz="1200" dirty="0"/>
+              <a:rPr lang="en-US" sz="1150" spc="240" kern="0" dirty="0">
+                <a:solidFill>
+                  <a:srgbClr val="C8A67B"/>
+                </a:solidFill>
+                <a:latin typeface="Corbel" pitchFamily="34" charset="0"/>
+                <a:ea typeface="Corbel" pitchFamily="34" charset="-122"/>
+                <a:cs typeface="Corbel" pitchFamily="34" charset="-120"/>
+              </a:rPr>
+              <a:t>ICBB-RM101   ·   Unit 6 of 10</a:t>
+            </a:r>
+            <a:endParaRPr lang="en-US" sz="1150" dirty="0"/>
           </a:p>
         </p:txBody>
       </p:sp>
@@ -2770,8 +2779,8 @@
         </p:nvSpPr>
         <p:spPr>
           <a:xfrm>
-            <a:off x="548640" y="1371600"/>
-            <a:ext cx="6766560" cy="1371600"/>
+            <a:off x="685800" y="1700784"/>
+            <a:ext cx="6858000" cy="1417320"/>
           </a:xfrm>
           <a:prstGeom prst="rect">
             <a:avLst/>
@@ -2784,17 +2793,23 @@
           <a:lstStyle/>
           <a:p>
             <a:pPr indent="0" marL="0">
+              <a:lnSpc>
+                <a:spcPct val="102000"/>
+              </a:lnSpc>
               <a:buNone/>
             </a:pPr>
             <a:r>
-              <a:rPr lang="en-US" sz="3400" b="1" dirty="0">
+              <a:rPr lang="en-US" sz="3300" dirty="0">
                 <a:solidFill>
                   <a:srgbClr val="FFFFFF"/>
                 </a:solidFill>
+                <a:latin typeface="Constantia" pitchFamily="34" charset="0"/>
+                <a:ea typeface="Constantia" pitchFamily="34" charset="-122"/>
+                <a:cs typeface="Constantia" pitchFamily="34" charset="-120"/>
               </a:rPr>
               <a:t>Qualitative Research Designs</a:t>
             </a:r>
-            <a:endParaRPr lang="en-US" sz="3400" dirty="0"/>
+            <a:endParaRPr lang="en-US" sz="3300" dirty="0"/>
           </a:p>
         </p:txBody>
       </p:sp>
@@ -2806,8 +2821,8 @@
         </p:nvSpPr>
         <p:spPr>
           <a:xfrm>
-            <a:off x="548640" y="2788920"/>
-            <a:ext cx="6766560" cy="1188720"/>
+            <a:off x="685800" y="3127248"/>
+            <a:ext cx="6309360" cy="1051560"/>
           </a:xfrm>
           <a:prstGeom prst="rect">
             <a:avLst/>
@@ -2821,19 +2836,22 @@
           <a:p>
             <a:pPr indent="0" marL="0">
               <a:lnSpc>
-                <a:spcPct val="120000"/>
+                <a:spcPct val="128000"/>
               </a:lnSpc>
               <a:buNone/>
             </a:pPr>
             <a:r>
-              <a:rPr lang="en-US" sz="1400" dirty="0">
-                <a:solidFill>
-                  <a:srgbClr val="DCE7F5"/>
-                </a:solidFill>
+              <a:rPr lang="en-US" sz="1350" dirty="0">
+                <a:solidFill>
+                  <a:srgbClr val="B9C2CB"/>
+                </a:solidFill>
+                <a:latin typeface="Corbel" pitchFamily="34" charset="0"/>
+                <a:ea typeface="Corbel" pitchFamily="34" charset="-122"/>
+                <a:cs typeface="Corbel" pitchFamily="34" charset="-120"/>
               </a:rPr>
               <a:t>The major qualitative traditions, the data collection methods attached to each, and how rigour is established when the aim is understanding rather than measurement.</a:t>
             </a:r>
-            <a:endParaRPr lang="en-US" sz="1400" dirty="0"/>
+            <a:endParaRPr lang="en-US" sz="1350" dirty="0"/>
           </a:p>
         </p:txBody>
       </p:sp>
@@ -2845,8 +2863,8 @@
         </p:nvSpPr>
         <p:spPr>
           <a:xfrm>
-            <a:off x="548640" y="4645152"/>
-            <a:ext cx="5486400" cy="365760"/>
+            <a:off x="685800" y="4407408"/>
+            <a:ext cx="4572000" cy="274320"/>
           </a:xfrm>
           <a:prstGeom prst="rect">
             <a:avLst/>
@@ -2862,14 +2880,17 @@
               <a:buNone/>
             </a:pPr>
             <a:r>
-              <a:rPr lang="en-US" sz="1200" b="1" dirty="0">
-                <a:solidFill>
-                  <a:srgbClr val="FFFFFF"/>
-                </a:solidFill>
-              </a:rPr>
-              <a:t>Jesse Anak  ·  ICBB</a:t>
-            </a:r>
-            <a:endParaRPr lang="en-US" sz="1200" dirty="0"/>
+              <a:rPr lang="en-US" sz="1050" spc="120" kern="0" dirty="0">
+                <a:solidFill>
+                  <a:srgbClr val="8894A0"/>
+                </a:solidFill>
+                <a:latin typeface="Corbel" pitchFamily="34" charset="0"/>
+                <a:ea typeface="Corbel" pitchFamily="34" charset="-122"/>
+                <a:cs typeface="Corbel" pitchFamily="34" charset="-120"/>
+              </a:rPr>
+              <a:t>Jesse Anak   ·   ICBB</a:t>
+            </a:r>
+            <a:endParaRPr lang="en-US" sz="1050" dirty="0"/>
           </a:p>
         </p:txBody>
       </p:sp>
@@ -2906,8 +2927,8 @@
         </p:nvSpPr>
         <p:spPr>
           <a:xfrm>
-            <a:off x="502920" y="292608"/>
-            <a:ext cx="8046720" cy="228600"/>
+            <a:off x="566928" y="384048"/>
+            <a:ext cx="7772400" cy="237744"/>
           </a:xfrm>
           <a:prstGeom prst="rect">
             <a:avLst/>
@@ -2923,14 +2944,17 @@
               <a:buNone/>
             </a:pPr>
             <a:r>
-              <a:rPr lang="en-US" sz="1100" b="1" spc="150" kern="0" dirty="0">
-                <a:solidFill>
-                  <a:srgbClr val="0066CC"/>
-                </a:solidFill>
+              <a:rPr lang="en-US" sz="1000" spc="200" kern="0" dirty="0">
+                <a:solidFill>
+                  <a:srgbClr val="9A6A3C"/>
+                </a:solidFill>
+                <a:latin typeface="Corbel" pitchFamily="34" charset="0"/>
+                <a:ea typeface="Corbel" pitchFamily="34" charset="-122"/>
+                <a:cs typeface="Corbel" pitchFamily="34" charset="-120"/>
               </a:rPr>
               <a:t>UNIT 6</a:t>
             </a:r>
-            <a:endParaRPr lang="en-US" sz="1100" dirty="0"/>
+            <a:endParaRPr lang="en-US" sz="1000" dirty="0"/>
           </a:p>
         </p:txBody>
       </p:sp>
@@ -2942,8 +2966,8 @@
         </p:nvSpPr>
         <p:spPr>
           <a:xfrm>
-            <a:off x="502920" y="548640"/>
-            <a:ext cx="8046720" cy="640080"/>
+            <a:off x="566928" y="658368"/>
+            <a:ext cx="7772400" cy="658368"/>
           </a:xfrm>
           <a:prstGeom prst="rect">
             <a:avLst/>
@@ -2956,30 +2980,56 @@
           <a:lstStyle/>
           <a:p>
             <a:pPr indent="0" marL="0">
+              <a:lnSpc>
+                <a:spcPct val="100000"/>
+              </a:lnSpc>
               <a:buNone/>
             </a:pPr>
             <a:r>
-              <a:rPr lang="en-US" sz="2400" b="1" dirty="0">
-                <a:solidFill>
-                  <a:srgbClr val="111827"/>
-                </a:solidFill>
+              <a:rPr lang="en-US" sz="2500" dirty="0">
+                <a:solidFill>
+                  <a:srgbClr val="1C3140"/>
+                </a:solidFill>
+                <a:latin typeface="Constantia" pitchFamily="34" charset="0"/>
+                <a:ea typeface="Constantia" pitchFamily="34" charset="-122"/>
+                <a:cs typeface="Constantia" pitchFamily="34" charset="-120"/>
               </a:rPr>
               <a:t>Sampling and sample size (1/2)</a:t>
             </a:r>
-            <a:endParaRPr lang="en-US" sz="2400" dirty="0"/>
-          </a:p>
-        </p:txBody>
-      </p:sp>
-      <p:sp>
-        <p:nvSpPr>
-          <p:cNvPr id="4" name="Text 2"/>
+            <a:endParaRPr lang="en-US" sz="2500" dirty="0"/>
+          </a:p>
+        </p:txBody>
+      </p:sp>
+      <p:sp>
+        <p:nvSpPr>
+          <p:cNvPr id="4" name="Shape 2"/>
           <p:cNvSpPr/>
           <p:nvPr/>
         </p:nvSpPr>
         <p:spPr>
           <a:xfrm>
-            <a:off x="685800" y="1325880"/>
-            <a:ext cx="7772400" cy="3200400"/>
+            <a:off x="566928" y="1335024"/>
+            <a:ext cx="566928" cy="20117"/>
+          </a:xfrm>
+          <a:prstGeom prst="rect">
+            <a:avLst/>
+          </a:prstGeom>
+          <a:solidFill>
+            <a:srgbClr val="9A6A3C"/>
+          </a:solidFill>
+          <a:ln/>
+        </p:spPr>
+      </p:sp>
+      <p:sp>
+        <p:nvSpPr>
+          <p:cNvPr id="5" name="Text 3"/>
+          <p:cNvSpPr/>
+          <p:nvPr/>
+        </p:nvSpPr>
+        <p:spPr>
+          <a:xfrm>
+            <a:off x="713232" y="1664208"/>
+            <a:ext cx="7498080" cy="2788920"/>
           </a:xfrm>
           <a:prstGeom prst="rect">
             <a:avLst/>
@@ -2993,19 +3043,22 @@
           <a:p>
             <a:pPr marL="342900" indent="-342900">
               <a:lnSpc>
-                <a:spcPct val="125000"/>
+                <a:spcPct val="130000"/>
               </a:lnSpc>
               <a:spcAft>
-                <a:spcPts val="800"/>
+                <a:spcPts val="1100"/>
               </a:spcAft>
               <a:buSzPct val="100000"/>
-              <a:buChar char="•"/>
+              <a:buChar char="–"/>
             </a:pPr>
             <a:r>
               <a:rPr lang="en-US" sz="1500" dirty="0">
                 <a:solidFill>
-                  <a:srgbClr val="374151"/>
-                </a:solidFill>
+                  <a:srgbClr val="23282E"/>
+                </a:solidFill>
+                <a:latin typeface="Corbel" pitchFamily="34" charset="0"/>
+                <a:ea typeface="Corbel" pitchFamily="34" charset="-122"/>
+                <a:cs typeface="Corbel" pitchFamily="34" charset="-120"/>
               </a:rPr>
               <a:t>Sampling is purposive: participants are chosen because they can illuminate the question, not to represent a population statistically</a:t>
             </a:r>
@@ -3014,19 +3067,22 @@
           <a:p>
             <a:pPr marL="342900" indent="-342900">
               <a:lnSpc>
-                <a:spcPct val="125000"/>
+                <a:spcPct val="130000"/>
               </a:lnSpc>
               <a:spcAft>
-                <a:spcPts val="800"/>
+                <a:spcPts val="1100"/>
               </a:spcAft>
               <a:buSzPct val="100000"/>
-              <a:buChar char="•"/>
+              <a:buChar char="–"/>
             </a:pPr>
             <a:r>
               <a:rPr lang="en-US" sz="1500" dirty="0">
                 <a:solidFill>
-                  <a:srgbClr val="374151"/>
-                </a:solidFill>
+                  <a:srgbClr val="23282E"/>
+                </a:solidFill>
+                <a:latin typeface="Corbel" pitchFamily="34" charset="0"/>
+                <a:ea typeface="Corbel" pitchFamily="34" charset="-122"/>
+                <a:cs typeface="Corbel" pitchFamily="34" charset="-120"/>
               </a:rPr>
               <a:t>Maximum variation sampling seeks diversity; homogeneous sampling seeks depth within a defined group</a:t>
             </a:r>
@@ -3035,19 +3091,22 @@
           <a:p>
             <a:pPr marL="342900" indent="-342900">
               <a:lnSpc>
-                <a:spcPct val="125000"/>
+                <a:spcPct val="130000"/>
               </a:lnSpc>
               <a:spcAft>
-                <a:spcPts val="800"/>
+                <a:spcPts val="1100"/>
               </a:spcAft>
               <a:buSzPct val="100000"/>
-              <a:buChar char="•"/>
+              <a:buChar char="–"/>
             </a:pPr>
             <a:r>
               <a:rPr lang="en-US" sz="1500" dirty="0">
                 <a:solidFill>
-                  <a:srgbClr val="374151"/>
-                </a:solidFill>
+                  <a:srgbClr val="23282E"/>
+                </a:solidFill>
+                <a:latin typeface="Corbel" pitchFamily="34" charset="0"/>
+                <a:ea typeface="Corbel" pitchFamily="34" charset="-122"/>
+                <a:cs typeface="Corbel" pitchFamily="34" charset="-120"/>
               </a:rPr>
               <a:t>Theoretical sampling, specific to grounded theory, selects the next participant based on what the emerging analysis requires</a:t>
             </a:r>
@@ -3056,19 +3115,22 @@
           <a:p>
             <a:pPr marL="342900" indent="-342900">
               <a:lnSpc>
-                <a:spcPct val="125000"/>
+                <a:spcPct val="130000"/>
               </a:lnSpc>
               <a:spcAft>
-                <a:spcPts val="800"/>
+                <a:spcPts val="1100"/>
               </a:spcAft>
               <a:buSzPct val="100000"/>
-              <a:buChar char="•"/>
+              <a:buChar char="–"/>
             </a:pPr>
             <a:r>
               <a:rPr lang="en-US" sz="1500" dirty="0">
                 <a:solidFill>
-                  <a:srgbClr val="374151"/>
-                </a:solidFill>
+                  <a:srgbClr val="23282E"/>
+                </a:solidFill>
+                <a:latin typeface="Corbel" pitchFamily="34" charset="0"/>
+                <a:ea typeface="Corbel" pitchFamily="34" charset="-122"/>
+                <a:cs typeface="Corbel" pitchFamily="34" charset="-120"/>
               </a:rPr>
               <a:t>Snowball sampling reaches hidden populations but tends to stay within one network</a:t>
             </a:r>
@@ -3088,8 +3150,8 @@
         </p:nvSpPr>
         <p:spPr>
           <a:xfrm>
-            <a:off x="8503920" y="4709160"/>
-            <a:ext cx="800000" cy="300000"/>
+            <a:off x="566928" y="4700016"/>
+            <a:ext cx="914400" cy="274320"/>
           </a:xfrm>
           <a:prstGeom prst="rect">
             <a:avLst/>
@@ -3104,10 +3166,13 @@
           <a:bodyPr/>
           <a:lstStyle>
             <a:lvl1pPr>
-              <a:defRPr sz="1000">
-                <a:solidFill>
-                  <a:srgbClr val="6B7280"/>
-                </a:solidFill>
+              <a:defRPr sz="900">
+                <a:solidFill>
+                  <a:srgbClr val="5F6B76"/>
+                </a:solidFill>
+                <a:latin typeface="Corbel"/>
+                <a:ea typeface="Corbel"/>
+                <a:cs typeface="Corbel"/>
               </a:defRPr>
             </a:lvl1pPr>
           </a:lstStyle>
@@ -3154,8 +3219,8 @@
         </p:nvSpPr>
         <p:spPr>
           <a:xfrm>
-            <a:off x="502920" y="292608"/>
-            <a:ext cx="8046720" cy="228600"/>
+            <a:off x="566928" y="384048"/>
+            <a:ext cx="7772400" cy="237744"/>
           </a:xfrm>
           <a:prstGeom prst="rect">
             <a:avLst/>
@@ -3171,14 +3236,17 @@
               <a:buNone/>
             </a:pPr>
             <a:r>
-              <a:rPr lang="en-US" sz="1100" b="1" spc="150" kern="0" dirty="0">
-                <a:solidFill>
-                  <a:srgbClr val="0066CC"/>
-                </a:solidFill>
+              <a:rPr lang="en-US" sz="1000" spc="200" kern="0" dirty="0">
+                <a:solidFill>
+                  <a:srgbClr val="9A6A3C"/>
+                </a:solidFill>
+                <a:latin typeface="Corbel" pitchFamily="34" charset="0"/>
+                <a:ea typeface="Corbel" pitchFamily="34" charset="-122"/>
+                <a:cs typeface="Corbel" pitchFamily="34" charset="-120"/>
               </a:rPr>
               <a:t>UNIT 6</a:t>
             </a:r>
-            <a:endParaRPr lang="en-US" sz="1100" dirty="0"/>
+            <a:endParaRPr lang="en-US" sz="1000" dirty="0"/>
           </a:p>
         </p:txBody>
       </p:sp>
@@ -3190,8 +3258,8 @@
         </p:nvSpPr>
         <p:spPr>
           <a:xfrm>
-            <a:off x="502920" y="548640"/>
-            <a:ext cx="8046720" cy="640080"/>
+            <a:off x="566928" y="658368"/>
+            <a:ext cx="7772400" cy="658368"/>
           </a:xfrm>
           <a:prstGeom prst="rect">
             <a:avLst/>
@@ -3204,30 +3272,56 @@
           <a:lstStyle/>
           <a:p>
             <a:pPr indent="0" marL="0">
+              <a:lnSpc>
+                <a:spcPct val="100000"/>
+              </a:lnSpc>
               <a:buNone/>
             </a:pPr>
             <a:r>
-              <a:rPr lang="en-US" sz="2400" b="1" dirty="0">
-                <a:solidFill>
-                  <a:srgbClr val="111827"/>
-                </a:solidFill>
+              <a:rPr lang="en-US" sz="2500" dirty="0">
+                <a:solidFill>
+                  <a:srgbClr val="1C3140"/>
+                </a:solidFill>
+                <a:latin typeface="Constantia" pitchFamily="34" charset="0"/>
+                <a:ea typeface="Constantia" pitchFamily="34" charset="-122"/>
+                <a:cs typeface="Constantia" pitchFamily="34" charset="-120"/>
               </a:rPr>
               <a:t>Sampling and sample size (2/2)</a:t>
             </a:r>
-            <a:endParaRPr lang="en-US" sz="2400" dirty="0"/>
-          </a:p>
-        </p:txBody>
-      </p:sp>
-      <p:sp>
-        <p:nvSpPr>
-          <p:cNvPr id="4" name="Text 2"/>
+            <a:endParaRPr lang="en-US" sz="2500" dirty="0"/>
+          </a:p>
+        </p:txBody>
+      </p:sp>
+      <p:sp>
+        <p:nvSpPr>
+          <p:cNvPr id="4" name="Shape 2"/>
           <p:cNvSpPr/>
           <p:nvPr/>
         </p:nvSpPr>
         <p:spPr>
           <a:xfrm>
-            <a:off x="685800" y="1325880"/>
-            <a:ext cx="7772400" cy="3200400"/>
+            <a:off x="566928" y="1335024"/>
+            <a:ext cx="566928" cy="20117"/>
+          </a:xfrm>
+          <a:prstGeom prst="rect">
+            <a:avLst/>
+          </a:prstGeom>
+          <a:solidFill>
+            <a:srgbClr val="9A6A3C"/>
+          </a:solidFill>
+          <a:ln/>
+        </p:spPr>
+      </p:sp>
+      <p:sp>
+        <p:nvSpPr>
+          <p:cNvPr id="5" name="Text 3"/>
+          <p:cNvSpPr/>
+          <p:nvPr/>
+        </p:nvSpPr>
+        <p:spPr>
+          <a:xfrm>
+            <a:off x="713232" y="1664208"/>
+            <a:ext cx="7498080" cy="2788920"/>
           </a:xfrm>
           <a:prstGeom prst="rect">
             <a:avLst/>
@@ -3241,65 +3335,74 @@
           <a:p>
             <a:pPr marL="342900" indent="-342900">
               <a:lnSpc>
-                <a:spcPct val="125000"/>
+                <a:spcPct val="130000"/>
               </a:lnSpc>
               <a:spcAft>
-                <a:spcPts val="800"/>
+                <a:spcPts val="1100"/>
               </a:spcAft>
               <a:buSzPct val="100000"/>
-              <a:buChar char="•"/>
-            </a:pPr>
-            <a:r>
-              <a:rPr lang="en-US" sz="1300" dirty="0">
-                <a:solidFill>
-                  <a:srgbClr val="374151"/>
-                </a:solidFill>
+              <a:buChar char="–"/>
+            </a:pPr>
+            <a:r>
+              <a:rPr lang="en-US" sz="1350" dirty="0">
+                <a:solidFill>
+                  <a:srgbClr val="23282E"/>
+                </a:solidFill>
+                <a:latin typeface="Corbel" pitchFamily="34" charset="0"/>
+                <a:ea typeface="Corbel" pitchFamily="34" charset="-122"/>
+                <a:cs typeface="Corbel" pitchFamily="34" charset="-120"/>
               </a:rPr>
               <a:t>Saturation is the point where new data generate no new codes or themes</a:t>
             </a:r>
-            <a:endParaRPr lang="en-US" sz="1300" dirty="0"/>
+            <a:endParaRPr lang="en-US" sz="1350" dirty="0"/>
           </a:p>
           <a:p>
             <a:pPr marL="342900" indent="-342900">
               <a:lnSpc>
-                <a:spcPct val="125000"/>
+                <a:spcPct val="130000"/>
               </a:lnSpc>
               <a:spcAft>
-                <a:spcPts val="800"/>
+                <a:spcPts val="1100"/>
               </a:spcAft>
               <a:buSzPct val="100000"/>
-              <a:buChar char="•"/>
-            </a:pPr>
-            <a:r>
-              <a:rPr lang="en-US" sz="1300" dirty="0">
-                <a:solidFill>
-                  <a:srgbClr val="374151"/>
-                </a:solidFill>
+              <a:buChar char="–"/>
+            </a:pPr>
+            <a:r>
+              <a:rPr lang="en-US" sz="1350" dirty="0">
+                <a:solidFill>
+                  <a:srgbClr val="23282E"/>
+                </a:solidFill>
+                <a:latin typeface="Corbel" pitchFamily="34" charset="0"/>
+                <a:ea typeface="Corbel" pitchFamily="34" charset="-122"/>
+                <a:cs typeface="Corbel" pitchFamily="34" charset="-120"/>
               </a:rPr>
               <a:t>Information power is the more defensible modern concept: narrow aim, dense sample specificity, strong theory and strong dialogue all reduce the number needed</a:t>
             </a:r>
-            <a:endParaRPr lang="en-US" sz="1300" dirty="0"/>
+            <a:endParaRPr lang="en-US" sz="1350" dirty="0"/>
           </a:p>
           <a:p>
             <a:pPr marL="342900" indent="-342900">
               <a:lnSpc>
-                <a:spcPct val="125000"/>
+                <a:spcPct val="130000"/>
               </a:lnSpc>
               <a:spcAft>
-                <a:spcPts val="800"/>
+                <a:spcPts val="1100"/>
               </a:spcAft>
               <a:buSzPct val="100000"/>
-              <a:buChar char="•"/>
-            </a:pPr>
-            <a:r>
-              <a:rPr lang="en-US" sz="1300" dirty="0">
-                <a:solidFill>
-                  <a:srgbClr val="374151"/>
-                </a:solidFill>
+              <a:buChar char="–"/>
+            </a:pPr>
+            <a:r>
+              <a:rPr lang="en-US" sz="1350" dirty="0">
+                <a:solidFill>
+                  <a:srgbClr val="23282E"/>
+                </a:solidFill>
+                <a:latin typeface="Corbel" pitchFamily="34" charset="0"/>
+                <a:ea typeface="Corbel" pitchFamily="34" charset="-122"/>
+                <a:cs typeface="Corbel" pitchFamily="34" charset="-120"/>
               </a:rPr>
               <a:t>Typical ranges: 6-12 for a homogeneous phenomenological study, 20-30 for grounded theory, but justify rather than cite a number</a:t>
             </a:r>
-            <a:endParaRPr lang="en-US" sz="1300" dirty="0"/>
+            <a:endParaRPr lang="en-US" sz="1350" dirty="0"/>
           </a:p>
         </p:txBody>
       </p:sp>
@@ -3315,8 +3418,8 @@
         </p:nvSpPr>
         <p:spPr>
           <a:xfrm>
-            <a:off x="8503920" y="4709160"/>
-            <a:ext cx="800000" cy="300000"/>
+            <a:off x="566928" y="4700016"/>
+            <a:ext cx="914400" cy="274320"/>
           </a:xfrm>
           <a:prstGeom prst="rect">
             <a:avLst/>
@@ -3331,10 +3434,13 @@
           <a:bodyPr/>
           <a:lstStyle>
             <a:lvl1pPr>
-              <a:defRPr sz="1000">
-                <a:solidFill>
-                  <a:srgbClr val="6B7280"/>
-                </a:solidFill>
+              <a:defRPr sz="900">
+                <a:solidFill>
+                  <a:srgbClr val="5F6B76"/>
+                </a:solidFill>
+                <a:latin typeface="Corbel"/>
+                <a:ea typeface="Corbel"/>
+                <a:cs typeface="Corbel"/>
               </a:defRPr>
             </a:lvl1pPr>
           </a:lstStyle>
@@ -3381,8 +3487,8 @@
         </p:nvSpPr>
         <p:spPr>
           <a:xfrm>
-            <a:off x="502920" y="292608"/>
-            <a:ext cx="8046720" cy="228600"/>
+            <a:off x="566928" y="384048"/>
+            <a:ext cx="7772400" cy="237744"/>
           </a:xfrm>
           <a:prstGeom prst="rect">
             <a:avLst/>
@@ -3398,14 +3504,17 @@
               <a:buNone/>
             </a:pPr>
             <a:r>
-              <a:rPr lang="en-US" sz="1100" b="1" spc="150" kern="0" dirty="0">
-                <a:solidFill>
-                  <a:srgbClr val="00A86B"/>
-                </a:solidFill>
+              <a:rPr lang="en-US" sz="1000" spc="200" kern="0" dirty="0">
+                <a:solidFill>
+                  <a:srgbClr val="9A6A3C"/>
+                </a:solidFill>
+                <a:latin typeface="Corbel" pitchFamily="34" charset="0"/>
+                <a:ea typeface="Corbel" pitchFamily="34" charset="-122"/>
+                <a:cs typeface="Corbel" pitchFamily="34" charset="-120"/>
               </a:rPr>
               <a:t>UNIT 6</a:t>
             </a:r>
-            <a:endParaRPr lang="en-US" sz="1100" dirty="0"/>
+            <a:endParaRPr lang="en-US" sz="1000" dirty="0"/>
           </a:p>
         </p:txBody>
       </p:sp>
@@ -3417,8 +3526,8 @@
         </p:nvSpPr>
         <p:spPr>
           <a:xfrm>
-            <a:off x="502920" y="548640"/>
-            <a:ext cx="8046720" cy="548640"/>
+            <a:off x="566928" y="658368"/>
+            <a:ext cx="7772400" cy="658368"/>
           </a:xfrm>
           <a:prstGeom prst="rect">
             <a:avLst/>
@@ -3427,21 +3536,27 @@
           <a:ln/>
         </p:spPr>
         <p:txBody>
-          <a:bodyPr wrap="square" rtlCol="0" anchor="ctr"/>
+          <a:bodyPr wrap="square" rtlCol="0" anchor="t"/>
           <a:lstStyle/>
           <a:p>
             <a:pPr indent="0" marL="0">
+              <a:lnSpc>
+                <a:spcPct val="100000"/>
+              </a:lnSpc>
               <a:buNone/>
             </a:pPr>
             <a:r>
-              <a:rPr lang="en-US" sz="2400" b="1" dirty="0">
-                <a:solidFill>
-                  <a:srgbClr val="111827"/>
-                </a:solidFill>
+              <a:rPr lang="en-US" sz="2500" dirty="0">
+                <a:solidFill>
+                  <a:srgbClr val="1C3140"/>
+                </a:solidFill>
+                <a:latin typeface="Constantia" pitchFamily="34" charset="0"/>
+                <a:ea typeface="Constantia" pitchFamily="34" charset="-122"/>
+                <a:cs typeface="Constantia" pitchFamily="34" charset="-120"/>
               </a:rPr>
               <a:t>In practice</a:t>
             </a:r>
-            <a:endParaRPr lang="en-US" sz="2400" dirty="0"/>
+            <a:endParaRPr lang="en-US" sz="2500" dirty="0"/>
           </a:p>
         </p:txBody>
       </p:sp>
@@ -3453,28 +3568,48 @@
         </p:nvSpPr>
         <p:spPr>
           <a:xfrm>
-            <a:off x="502920" y="1280160"/>
-            <a:ext cx="54864" cy="2377440"/>
+            <a:off x="566928" y="1335024"/>
+            <a:ext cx="566928" cy="20117"/>
           </a:xfrm>
           <a:prstGeom prst="rect">
             <a:avLst/>
           </a:prstGeom>
           <a:solidFill>
-            <a:srgbClr val="00A86B"/>
+            <a:srgbClr val="9A6A3C"/>
           </a:solidFill>
           <a:ln/>
         </p:spPr>
       </p:sp>
       <p:sp>
         <p:nvSpPr>
-          <p:cNvPr id="5" name="Text 3"/>
+          <p:cNvPr id="5" name="Shape 3"/>
           <p:cNvSpPr/>
           <p:nvPr/>
         </p:nvSpPr>
         <p:spPr>
           <a:xfrm>
-            <a:off x="777240" y="1280160"/>
-            <a:ext cx="7589520" cy="2377440"/>
+            <a:off x="566928" y="1664208"/>
+            <a:ext cx="8010144" cy="2395728"/>
+          </a:xfrm>
+          <a:prstGeom prst="rect">
+            <a:avLst/>
+          </a:prstGeom>
+          <a:solidFill>
+            <a:srgbClr val="F6F4F0"/>
+          </a:solidFill>
+          <a:ln/>
+        </p:spPr>
+      </p:sp>
+      <p:sp>
+        <p:nvSpPr>
+          <p:cNvPr id="6" name="Text 4"/>
+          <p:cNvSpPr/>
+          <p:nvPr/>
+        </p:nvSpPr>
+        <p:spPr>
+          <a:xfrm>
+            <a:off x="932688" y="1847088"/>
+            <a:ext cx="7278624" cy="2029968"/>
           </a:xfrm>
           <a:prstGeom prst="rect">
             <a:avLst/>
@@ -3488,15 +3623,18 @@
           <a:p>
             <a:pPr indent="0" marL="0">
               <a:lnSpc>
-                <a:spcPct val="130000"/>
+                <a:spcPct val="132000"/>
               </a:lnSpc>
               <a:buNone/>
             </a:pPr>
             <a:r>
-              <a:rPr lang="en-US" sz="1600" dirty="0">
-                <a:solidFill>
-                  <a:srgbClr val="374151"/>
-                </a:solidFill>
+              <a:rPr lang="en-US" sz="1600" i="1" dirty="0">
+                <a:solidFill>
+                  <a:srgbClr val="1C3140"/>
+                </a:solidFill>
+                <a:latin typeface="Constantia" pitchFamily="34" charset="0"/>
+                <a:ea typeface="Constantia" pitchFamily="34" charset="-122"/>
+                <a:cs typeface="Constantia" pitchFamily="34" charset="-120"/>
               </a:rPr>
               <a:t>Declaring saturation after a fixed number of interviews planned in advance is not saturation. Saturation is something you observe during analysis and must be able to evidence.</a:t>
             </a:r>
@@ -3516,8 +3654,8 @@
         </p:nvSpPr>
         <p:spPr>
           <a:xfrm>
-            <a:off x="8503920" y="4709160"/>
-            <a:ext cx="800000" cy="300000"/>
+            <a:off x="566928" y="4700016"/>
+            <a:ext cx="914400" cy="274320"/>
           </a:xfrm>
           <a:prstGeom prst="rect">
             <a:avLst/>
@@ -3532,10 +3670,13 @@
           <a:bodyPr/>
           <a:lstStyle>
             <a:lvl1pPr>
-              <a:defRPr sz="1000">
-                <a:solidFill>
-                  <a:srgbClr val="6B7280"/>
-                </a:solidFill>
+              <a:defRPr sz="900">
+                <a:solidFill>
+                  <a:srgbClr val="5F6B76"/>
+                </a:solidFill>
+                <a:latin typeface="Corbel"/>
+                <a:ea typeface="Corbel"/>
+                <a:cs typeface="Corbel"/>
               </a:defRPr>
             </a:lvl1pPr>
           </a:lstStyle>
@@ -3582,8 +3723,8 @@
         </p:nvSpPr>
         <p:spPr>
           <a:xfrm>
-            <a:off x="502920" y="292608"/>
-            <a:ext cx="8046720" cy="228600"/>
+            <a:off x="566928" y="384048"/>
+            <a:ext cx="7772400" cy="237744"/>
           </a:xfrm>
           <a:prstGeom prst="rect">
             <a:avLst/>
@@ -3599,14 +3740,17 @@
               <a:buNone/>
             </a:pPr>
             <a:r>
-              <a:rPr lang="en-US" sz="1100" b="1" spc="150" kern="0" dirty="0">
-                <a:solidFill>
-                  <a:srgbClr val="0066CC"/>
-                </a:solidFill>
+              <a:rPr lang="en-US" sz="1000" spc="200" kern="0" dirty="0">
+                <a:solidFill>
+                  <a:srgbClr val="9A6A3C"/>
+                </a:solidFill>
+                <a:latin typeface="Corbel" pitchFamily="34" charset="0"/>
+                <a:ea typeface="Corbel" pitchFamily="34" charset="-122"/>
+                <a:cs typeface="Corbel" pitchFamily="34" charset="-120"/>
               </a:rPr>
               <a:t>UNIT 6</a:t>
             </a:r>
-            <a:endParaRPr lang="en-US" sz="1100" dirty="0"/>
+            <a:endParaRPr lang="en-US" sz="1000" dirty="0"/>
           </a:p>
         </p:txBody>
       </p:sp>
@@ -3618,8 +3762,8 @@
         </p:nvSpPr>
         <p:spPr>
           <a:xfrm>
-            <a:off x="502920" y="548640"/>
-            <a:ext cx="8046720" cy="640080"/>
+            <a:off x="566928" y="658368"/>
+            <a:ext cx="7772400" cy="658368"/>
           </a:xfrm>
           <a:prstGeom prst="rect">
             <a:avLst/>
@@ -3632,30 +3776,56 @@
           <a:lstStyle/>
           <a:p>
             <a:pPr indent="0" marL="0">
+              <a:lnSpc>
+                <a:spcPct val="100000"/>
+              </a:lnSpc>
               <a:buNone/>
             </a:pPr>
             <a:r>
-              <a:rPr lang="en-US" sz="2400" b="1" dirty="0">
-                <a:solidFill>
-                  <a:srgbClr val="111827"/>
-                </a:solidFill>
+              <a:rPr lang="en-US" sz="2500" dirty="0">
+                <a:solidFill>
+                  <a:srgbClr val="1C3140"/>
+                </a:solidFill>
+                <a:latin typeface="Constantia" pitchFamily="34" charset="0"/>
+                <a:ea typeface="Constantia" pitchFamily="34" charset="-122"/>
+                <a:cs typeface="Constantia" pitchFamily="34" charset="-120"/>
               </a:rPr>
               <a:t>Rigour and reflexivity (1/2)</a:t>
             </a:r>
-            <a:endParaRPr lang="en-US" sz="2400" dirty="0"/>
-          </a:p>
-        </p:txBody>
-      </p:sp>
-      <p:sp>
-        <p:nvSpPr>
-          <p:cNvPr id="4" name="Text 2"/>
+            <a:endParaRPr lang="en-US" sz="2500" dirty="0"/>
+          </a:p>
+        </p:txBody>
+      </p:sp>
+      <p:sp>
+        <p:nvSpPr>
+          <p:cNvPr id="4" name="Shape 2"/>
           <p:cNvSpPr/>
           <p:nvPr/>
         </p:nvSpPr>
         <p:spPr>
           <a:xfrm>
-            <a:off x="685800" y="1325880"/>
-            <a:ext cx="7772400" cy="3200400"/>
+            <a:off x="566928" y="1335024"/>
+            <a:ext cx="566928" cy="20117"/>
+          </a:xfrm>
+          <a:prstGeom prst="rect">
+            <a:avLst/>
+          </a:prstGeom>
+          <a:solidFill>
+            <a:srgbClr val="9A6A3C"/>
+          </a:solidFill>
+          <a:ln/>
+        </p:spPr>
+      </p:sp>
+      <p:sp>
+        <p:nvSpPr>
+          <p:cNvPr id="5" name="Text 3"/>
+          <p:cNvSpPr/>
+          <p:nvPr/>
+        </p:nvSpPr>
+        <p:spPr>
+          <a:xfrm>
+            <a:off x="713232" y="1664208"/>
+            <a:ext cx="7498080" cy="2788920"/>
           </a:xfrm>
           <a:prstGeom prst="rect">
             <a:avLst/>
@@ -3669,19 +3839,22 @@
           <a:p>
             <a:pPr marL="342900" indent="-342900">
               <a:lnSpc>
-                <a:spcPct val="125000"/>
+                <a:spcPct val="130000"/>
               </a:lnSpc>
               <a:spcAft>
-                <a:spcPts val="800"/>
+                <a:spcPts val="1100"/>
               </a:spcAft>
               <a:buSzPct val="100000"/>
-              <a:buChar char="•"/>
+              <a:buChar char="–"/>
             </a:pPr>
             <a:r>
               <a:rPr lang="en-US" sz="1500" dirty="0">
                 <a:solidFill>
-                  <a:srgbClr val="374151"/>
-                </a:solidFill>
+                  <a:srgbClr val="23282E"/>
+                </a:solidFill>
+                <a:latin typeface="Corbel" pitchFamily="34" charset="0"/>
+                <a:ea typeface="Corbel" pitchFamily="34" charset="-122"/>
+                <a:cs typeface="Corbel" pitchFamily="34" charset="-120"/>
               </a:rPr>
               <a:t>Credibility — do the findings represent the participants' reality? Supported by member checking, triangulation and prolonged engagement</a:t>
             </a:r>
@@ -3690,19 +3863,22 @@
           <a:p>
             <a:pPr marL="342900" indent="-342900">
               <a:lnSpc>
-                <a:spcPct val="125000"/>
+                <a:spcPct val="130000"/>
               </a:lnSpc>
               <a:spcAft>
-                <a:spcPts val="800"/>
+                <a:spcPts val="1100"/>
               </a:spcAft>
               <a:buSzPct val="100000"/>
-              <a:buChar char="•"/>
+              <a:buChar char="–"/>
             </a:pPr>
             <a:r>
               <a:rPr lang="en-US" sz="1500" dirty="0">
                 <a:solidFill>
-                  <a:srgbClr val="374151"/>
-                </a:solidFill>
+                  <a:srgbClr val="23282E"/>
+                </a:solidFill>
+                <a:latin typeface="Corbel" pitchFamily="34" charset="0"/>
+                <a:ea typeface="Corbel" pitchFamily="34" charset="-122"/>
+                <a:cs typeface="Corbel" pitchFamily="34" charset="-120"/>
               </a:rPr>
               <a:t>Transferability — could findings apply elsewhere? Supported by thick description of context so readers can judge</a:t>
             </a:r>
@@ -3711,42 +3887,24 @@
           <a:p>
             <a:pPr marL="342900" indent="-342900">
               <a:lnSpc>
-                <a:spcPct val="125000"/>
+                <a:spcPct val="130000"/>
               </a:lnSpc>
               <a:spcAft>
-                <a:spcPts val="800"/>
+                <a:spcPts val="1100"/>
               </a:spcAft>
               <a:buSzPct val="100000"/>
-              <a:buChar char="•"/>
+              <a:buChar char="–"/>
             </a:pPr>
             <a:r>
               <a:rPr lang="en-US" sz="1500" dirty="0">
                 <a:solidFill>
-                  <a:srgbClr val="374151"/>
-                </a:solidFill>
+                  <a:srgbClr val="23282E"/>
+                </a:solidFill>
+                <a:latin typeface="Corbel" pitchFamily="34" charset="0"/>
+                <a:ea typeface="Corbel" pitchFamily="34" charset="-122"/>
+                <a:cs typeface="Corbel" pitchFamily="34" charset="-120"/>
               </a:rPr>
               <a:t>Dependability — would the process be consistent if repeated? Supported by an audit trail</a:t>
-            </a:r>
-            <a:endParaRPr lang="en-US" sz="1500" dirty="0"/>
-          </a:p>
-          <a:p>
-            <a:pPr marL="342900" indent="-342900">
-              <a:lnSpc>
-                <a:spcPct val="125000"/>
-              </a:lnSpc>
-              <a:spcAft>
-                <a:spcPts val="800"/>
-              </a:spcAft>
-              <a:buSzPct val="100000"/>
-              <a:buChar char="•"/>
-            </a:pPr>
-            <a:r>
-              <a:rPr lang="en-US" sz="1500" dirty="0">
-                <a:solidFill>
-                  <a:srgbClr val="374151"/>
-                </a:solidFill>
-              </a:rPr>
-              <a:t>Confirmability — do findings follow from the data rather than the researcher's preferences? Supported by memos and reflexive notes</a:t>
             </a:r>
             <a:endParaRPr lang="en-US" sz="1500" dirty="0"/>
           </a:p>
@@ -3764,8 +3922,8 @@
         </p:nvSpPr>
         <p:spPr>
           <a:xfrm>
-            <a:off x="8503920" y="4709160"/>
-            <a:ext cx="800000" cy="300000"/>
+            <a:off x="566928" y="4700016"/>
+            <a:ext cx="914400" cy="274320"/>
           </a:xfrm>
           <a:prstGeom prst="rect">
             <a:avLst/>
@@ -3780,10 +3938,13 @@
           <a:bodyPr/>
           <a:lstStyle>
             <a:lvl1pPr>
-              <a:defRPr sz="1000">
-                <a:solidFill>
-                  <a:srgbClr val="6B7280"/>
-                </a:solidFill>
+              <a:defRPr sz="900">
+                <a:solidFill>
+                  <a:srgbClr val="5F6B76"/>
+                </a:solidFill>
+                <a:latin typeface="Corbel"/>
+                <a:ea typeface="Corbel"/>
+                <a:cs typeface="Corbel"/>
               </a:defRPr>
             </a:lvl1pPr>
           </a:lstStyle>
@@ -3830,8 +3991,8 @@
         </p:nvSpPr>
         <p:spPr>
           <a:xfrm>
-            <a:off x="502920" y="292608"/>
-            <a:ext cx="8046720" cy="228600"/>
+            <a:off x="566928" y="384048"/>
+            <a:ext cx="7772400" cy="237744"/>
           </a:xfrm>
           <a:prstGeom prst="rect">
             <a:avLst/>
@@ -3847,14 +4008,17 @@
               <a:buNone/>
             </a:pPr>
             <a:r>
-              <a:rPr lang="en-US" sz="1100" b="1" spc="150" kern="0" dirty="0">
-                <a:solidFill>
-                  <a:srgbClr val="0066CC"/>
-                </a:solidFill>
+              <a:rPr lang="en-US" sz="1000" spc="200" kern="0" dirty="0">
+                <a:solidFill>
+                  <a:srgbClr val="9A6A3C"/>
+                </a:solidFill>
+                <a:latin typeface="Corbel" pitchFamily="34" charset="0"/>
+                <a:ea typeface="Corbel" pitchFamily="34" charset="-122"/>
+                <a:cs typeface="Corbel" pitchFamily="34" charset="-120"/>
               </a:rPr>
               <a:t>UNIT 6</a:t>
             </a:r>
-            <a:endParaRPr lang="en-US" sz="1100" dirty="0"/>
+            <a:endParaRPr lang="en-US" sz="1000" dirty="0"/>
           </a:p>
         </p:txBody>
       </p:sp>
@@ -3866,8 +4030,8 @@
         </p:nvSpPr>
         <p:spPr>
           <a:xfrm>
-            <a:off x="502920" y="548640"/>
-            <a:ext cx="8046720" cy="640080"/>
+            <a:off x="566928" y="658368"/>
+            <a:ext cx="7772400" cy="658368"/>
           </a:xfrm>
           <a:prstGeom prst="rect">
             <a:avLst/>
@@ -3880,30 +4044,56 @@
           <a:lstStyle/>
           <a:p>
             <a:pPr indent="0" marL="0">
+              <a:lnSpc>
+                <a:spcPct val="100000"/>
+              </a:lnSpc>
               <a:buNone/>
             </a:pPr>
             <a:r>
-              <a:rPr lang="en-US" sz="2400" b="1" dirty="0">
-                <a:solidFill>
-                  <a:srgbClr val="111827"/>
-                </a:solidFill>
+              <a:rPr lang="en-US" sz="2500" dirty="0">
+                <a:solidFill>
+                  <a:srgbClr val="1C3140"/>
+                </a:solidFill>
+                <a:latin typeface="Constantia" pitchFamily="34" charset="0"/>
+                <a:ea typeface="Constantia" pitchFamily="34" charset="-122"/>
+                <a:cs typeface="Constantia" pitchFamily="34" charset="-120"/>
               </a:rPr>
               <a:t>Rigour and reflexivity (2/2)</a:t>
             </a:r>
-            <a:endParaRPr lang="en-US" sz="2400" dirty="0"/>
-          </a:p>
-        </p:txBody>
-      </p:sp>
-      <p:sp>
-        <p:nvSpPr>
-          <p:cNvPr id="4" name="Text 2"/>
+            <a:endParaRPr lang="en-US" sz="2500" dirty="0"/>
+          </a:p>
+        </p:txBody>
+      </p:sp>
+      <p:sp>
+        <p:nvSpPr>
+          <p:cNvPr id="4" name="Shape 2"/>
           <p:cNvSpPr/>
           <p:nvPr/>
         </p:nvSpPr>
         <p:spPr>
           <a:xfrm>
-            <a:off x="685800" y="1325880"/>
-            <a:ext cx="7772400" cy="3200400"/>
+            <a:off x="566928" y="1335024"/>
+            <a:ext cx="566928" cy="20117"/>
+          </a:xfrm>
+          <a:prstGeom prst="rect">
+            <a:avLst/>
+          </a:prstGeom>
+          <a:solidFill>
+            <a:srgbClr val="9A6A3C"/>
+          </a:solidFill>
+          <a:ln/>
+        </p:spPr>
+      </p:sp>
+      <p:sp>
+        <p:nvSpPr>
+          <p:cNvPr id="5" name="Text 3"/>
+          <p:cNvSpPr/>
+          <p:nvPr/>
+        </p:nvSpPr>
+        <p:spPr>
+          <a:xfrm>
+            <a:off x="713232" y="1664208"/>
+            <a:ext cx="7498080" cy="2788920"/>
           </a:xfrm>
           <a:prstGeom prst="rect">
             <a:avLst/>
@@ -3917,40 +4107,70 @@
           <a:p>
             <a:pPr marL="342900" indent="-342900">
               <a:lnSpc>
-                <a:spcPct val="125000"/>
+                <a:spcPct val="130000"/>
               </a:lnSpc>
               <a:spcAft>
-                <a:spcPts val="800"/>
+                <a:spcPts val="1100"/>
               </a:spcAft>
               <a:buSzPct val="100000"/>
-              <a:buChar char="•"/>
+              <a:buChar char="–"/>
             </a:pPr>
             <a:r>
               <a:rPr lang="en-US" sz="1500" dirty="0">
                 <a:solidFill>
-                  <a:srgbClr val="374151"/>
-                </a:solidFill>
-              </a:rPr>
-              <a:t>Reflexivity means recording your own position — profession, assumptions, relationship to participants — and how it shaped the work</a:t>
+                  <a:srgbClr val="23282E"/>
+                </a:solidFill>
+                <a:latin typeface="Corbel" pitchFamily="34" charset="0"/>
+                <a:ea typeface="Corbel" pitchFamily="34" charset="-122"/>
+                <a:cs typeface="Corbel" pitchFamily="34" charset="-120"/>
+              </a:rPr>
+              <a:t>Confirmability — do findings follow from the data rather than the researcher's preferences? Supported by memos and reflexive notes</a:t>
             </a:r>
             <a:endParaRPr lang="en-US" sz="1500" dirty="0"/>
           </a:p>
           <a:p>
             <a:pPr marL="342900" indent="-342900">
               <a:lnSpc>
-                <a:spcPct val="125000"/>
+                <a:spcPct val="130000"/>
               </a:lnSpc>
               <a:spcAft>
-                <a:spcPts val="800"/>
+                <a:spcPts val="1100"/>
               </a:spcAft>
               <a:buSzPct val="100000"/>
-              <a:buChar char="•"/>
+              <a:buChar char="–"/>
             </a:pPr>
             <a:r>
               <a:rPr lang="en-US" sz="1500" dirty="0">
                 <a:solidFill>
-                  <a:srgbClr val="374151"/>
-                </a:solidFill>
+                  <a:srgbClr val="23282E"/>
+                </a:solidFill>
+                <a:latin typeface="Corbel" pitchFamily="34" charset="0"/>
+                <a:ea typeface="Corbel" pitchFamily="34" charset="-122"/>
+                <a:cs typeface="Corbel" pitchFamily="34" charset="-120"/>
+              </a:rPr>
+              <a:t>Reflexivity means recording your own position — profession, assumptions, relationship to participants — and how it shaped the work</a:t>
+            </a:r>
+            <a:endParaRPr lang="en-US" sz="1500" dirty="0"/>
+          </a:p>
+          <a:p>
+            <a:pPr marL="342900" indent="-342900">
+              <a:lnSpc>
+                <a:spcPct val="130000"/>
+              </a:lnSpc>
+              <a:spcAft>
+                <a:spcPts val="1100"/>
+              </a:spcAft>
+              <a:buSzPct val="100000"/>
+              <a:buChar char="–"/>
+            </a:pPr>
+            <a:r>
+              <a:rPr lang="en-US" sz="1500" dirty="0">
+                <a:solidFill>
+                  <a:srgbClr val="23282E"/>
+                </a:solidFill>
+                <a:latin typeface="Corbel" pitchFamily="34" charset="0"/>
+                <a:ea typeface="Corbel" pitchFamily="34" charset="-122"/>
+                <a:cs typeface="Corbel" pitchFamily="34" charset="-120"/>
               </a:rPr>
               <a:t>Generalisability in the statistical sense is not the aim, and apologising for its absence misunderstands the design</a:t>
             </a:r>
@@ -3970,8 +4190,8 @@
         </p:nvSpPr>
         <p:spPr>
           <a:xfrm>
-            <a:off x="8503920" y="4709160"/>
-            <a:ext cx="800000" cy="300000"/>
+            <a:off x="566928" y="4700016"/>
+            <a:ext cx="914400" cy="274320"/>
           </a:xfrm>
           <a:prstGeom prst="rect">
             <a:avLst/>
@@ -3986,10 +4206,13 @@
           <a:bodyPr/>
           <a:lstStyle>
             <a:lvl1pPr>
-              <a:defRPr sz="1000">
-                <a:solidFill>
-                  <a:srgbClr val="6B7280"/>
-                </a:solidFill>
+              <a:defRPr sz="900">
+                <a:solidFill>
+                  <a:srgbClr val="5F6B76"/>
+                </a:solidFill>
+                <a:latin typeface="Corbel"/>
+                <a:ea typeface="Corbel"/>
+                <a:cs typeface="Corbel"/>
               </a:defRPr>
             </a:lvl1pPr>
           </a:lstStyle>
@@ -4036,8 +4259,8 @@
         </p:nvSpPr>
         <p:spPr>
           <a:xfrm>
-            <a:off x="502920" y="292608"/>
-            <a:ext cx="8046720" cy="228600"/>
+            <a:off x="566928" y="384048"/>
+            <a:ext cx="7772400" cy="237744"/>
           </a:xfrm>
           <a:prstGeom prst="rect">
             <a:avLst/>
@@ -4053,14 +4276,17 @@
               <a:buNone/>
             </a:pPr>
             <a:r>
-              <a:rPr lang="en-US" sz="1100" b="1" spc="150" kern="0" dirty="0">
-                <a:solidFill>
-                  <a:srgbClr val="00A86B"/>
-                </a:solidFill>
+              <a:rPr lang="en-US" sz="1000" spc="200" kern="0" dirty="0">
+                <a:solidFill>
+                  <a:srgbClr val="9A6A3C"/>
+                </a:solidFill>
+                <a:latin typeface="Corbel" pitchFamily="34" charset="0"/>
+                <a:ea typeface="Corbel" pitchFamily="34" charset="-122"/>
+                <a:cs typeface="Corbel" pitchFamily="34" charset="-120"/>
               </a:rPr>
               <a:t>UNIT 6  ·  WORKED EXAMPLE</a:t>
             </a:r>
-            <a:endParaRPr lang="en-US" sz="1100" dirty="0"/>
+            <a:endParaRPr lang="en-US" sz="1000" dirty="0"/>
           </a:p>
         </p:txBody>
       </p:sp>
@@ -4072,8 +4298,8 @@
         </p:nvSpPr>
         <p:spPr>
           <a:xfrm>
-            <a:off x="502920" y="548640"/>
-            <a:ext cx="8046720" cy="566928"/>
+            <a:off x="566928" y="658368"/>
+            <a:ext cx="7772400" cy="658368"/>
           </a:xfrm>
           <a:prstGeom prst="rect">
             <a:avLst/>
@@ -4086,17 +4312,23 @@
           <a:lstStyle/>
           <a:p>
             <a:pPr indent="0" marL="0">
+              <a:lnSpc>
+                <a:spcPct val="100000"/>
+              </a:lnSpc>
               <a:buNone/>
             </a:pPr>
             <a:r>
-              <a:rPr lang="en-US" sz="2300" b="1" dirty="0">
-                <a:solidFill>
-                  <a:srgbClr val="111827"/>
-                </a:solidFill>
+              <a:rPr lang="en-US" sz="2500" dirty="0">
+                <a:solidFill>
+                  <a:srgbClr val="1C3140"/>
+                </a:solidFill>
+                <a:latin typeface="Constantia" pitchFamily="34" charset="0"/>
+                <a:ea typeface="Constantia" pitchFamily="34" charset="-122"/>
+                <a:cs typeface="Constantia" pitchFamily="34" charset="-120"/>
               </a:rPr>
               <a:t>The same topic in four qualitative traditions</a:t>
             </a:r>
-            <a:endParaRPr lang="en-US" sz="2300" dirty="0"/>
+            <a:endParaRPr lang="en-US" sz="2500" dirty="0"/>
           </a:p>
         </p:txBody>
       </p:sp>
@@ -4108,21 +4340,16 @@
         </p:nvSpPr>
         <p:spPr>
           <a:xfrm>
-            <a:off x="502920" y="1207008"/>
-            <a:ext cx="8138160" cy="3200400"/>
+            <a:off x="566928" y="1335024"/>
+            <a:ext cx="566928" cy="20117"/>
           </a:xfrm>
           <a:prstGeom prst="rect">
             <a:avLst/>
           </a:prstGeom>
           <a:solidFill>
-            <a:srgbClr val="F3F7FC"/>
+            <a:srgbClr val="9A6A3C"/>
           </a:solidFill>
-          <a:ln w="9525">
-            <a:solidFill>
-              <a:srgbClr val="0066CC"/>
-            </a:solidFill>
-            <a:prstDash val="solid"/>
-          </a:ln>
+          <a:ln/>
         </p:spPr>
       </p:sp>
       <p:sp>
@@ -4133,8 +4360,8 @@
         </p:nvSpPr>
         <p:spPr>
           <a:xfrm>
-            <a:off x="731520" y="1371600"/>
-            <a:ext cx="7680960" cy="1005840"/>
+            <a:off x="566928" y="1645920"/>
+            <a:ext cx="8010144" cy="822960"/>
           </a:xfrm>
           <a:prstGeom prst="rect">
             <a:avLst/>
@@ -4147,137 +4374,170 @@
           <a:lstStyle/>
           <a:p>
             <a:pPr indent="0" marL="0">
+              <a:lnSpc>
+                <a:spcPct val="124000"/>
+              </a:lnSpc>
+              <a:buNone/>
+            </a:pPr>
+            <a:r>
+              <a:rPr lang="en-US" sz="1300" i="1" dirty="0">
+                <a:solidFill>
+                  <a:srgbClr val="5F6B76"/>
+                </a:solidFill>
+                <a:latin typeface="Constantia" pitchFamily="34" charset="0"/>
+                <a:ea typeface="Constantia" pitchFamily="34" charset="-122"/>
+                <a:cs typeface="Constantia" pitchFamily="34" charset="-120"/>
+              </a:rPr>
+              <a:t>The topic is the experience of women living with obstetric fistula. Four traditions would produce four genuinely different studies.</a:t>
+            </a:r>
+            <a:endParaRPr lang="en-US" sz="1300" dirty="0"/>
+          </a:p>
+        </p:txBody>
+      </p:sp>
+      <p:sp>
+        <p:nvSpPr>
+          <p:cNvPr id="6" name="Text 4"/>
+          <p:cNvSpPr/>
+          <p:nvPr/>
+        </p:nvSpPr>
+        <p:spPr>
+          <a:xfrm>
+            <a:off x="786384" y="2523744"/>
+            <a:ext cx="7406640" cy="1920240"/>
+          </a:xfrm>
+          <a:prstGeom prst="rect">
+            <a:avLst/>
+          </a:prstGeom>
+          <a:noFill/>
+          <a:ln/>
+        </p:spPr>
+        <p:txBody>
+          <a:bodyPr wrap="square" rtlCol="0" anchor="t"/>
+          <a:lstStyle/>
+          <a:p>
+            <a:pPr marL="342900" indent="-342900">
               <a:lnSpc>
                 <a:spcPct val="120000"/>
               </a:lnSpc>
-              <a:buNone/>
-            </a:pPr>
-            <a:r>
-              <a:rPr lang="en-US" sz="1400" i="1" dirty="0">
-                <a:solidFill>
-                  <a:srgbClr val="374151"/>
-                </a:solidFill>
-              </a:rPr>
-              <a:t>The topic is the experience of women living with obstetric fistula. Four traditions would produce four genuinely different studies.</a:t>
-            </a:r>
-            <a:endParaRPr lang="en-US" sz="1400" dirty="0"/>
-          </a:p>
-        </p:txBody>
-      </p:sp>
-      <p:sp>
-        <p:nvSpPr>
-          <p:cNvPr id="6" name="Text 4"/>
-          <p:cNvSpPr/>
-          <p:nvPr/>
-        </p:nvSpPr>
-        <p:spPr>
-          <a:xfrm>
-            <a:off x="868680" y="2395728"/>
-            <a:ext cx="7452360" cy="1920240"/>
-          </a:xfrm>
-          <a:prstGeom prst="rect">
-            <a:avLst/>
-          </a:prstGeom>
-          <a:noFill/>
-          <a:ln/>
-        </p:spPr>
-        <p:txBody>
-          <a:bodyPr wrap="square" rtlCol="0" anchor="t"/>
-          <a:lstStyle/>
-          <a:p>
-            <a:pPr marL="342900" indent="-342900">
-              <a:lnSpc>
-                <a:spcPct val="115000"/>
-              </a:lnSpc>
+              <a:spcAft>
+                <a:spcPts val="500"/>
+              </a:spcAft>
               <a:buSzPct val="100000"/>
               <a:buFont typeface="+mj-lt"/>
               <a:buAutoNum type="arabicPeriod" startAt="1"/>
             </a:pPr>
             <a:r>
-              <a:rPr lang="en-US" sz="1300" dirty="0">
-                <a:solidFill>
-                  <a:srgbClr val="374151"/>
-                </a:solidFill>
+              <a:rPr lang="en-US" sz="1250" dirty="0">
+                <a:solidFill>
+                  <a:srgbClr val="23282E"/>
+                </a:solidFill>
+                <a:latin typeface="Corbel" pitchFamily="34" charset="0"/>
+                <a:ea typeface="Corbel" pitchFamily="34" charset="-122"/>
+                <a:cs typeface="Corbel" pitchFamily="34" charset="-120"/>
               </a:rPr>
               <a:t>Phenomenology: what is it like to live with fistula? 8-12 in-depth interviews, focused on lived experience.</a:t>
             </a:r>
-            <a:endParaRPr lang="en-US" sz="1300" dirty="0"/>
+            <a:endParaRPr lang="en-US" sz="1250" dirty="0"/>
           </a:p>
           <a:p>
             <a:pPr marL="342900" indent="-342900">
               <a:lnSpc>
-                <a:spcPct val="115000"/>
+                <a:spcPct val="120000"/>
               </a:lnSpc>
+              <a:spcAft>
+                <a:spcPts val="500"/>
+              </a:spcAft>
               <a:buSzPct val="100000"/>
               <a:buFont typeface="+mj-lt"/>
               <a:buAutoNum type="arabicPeriod" startAt="1"/>
             </a:pPr>
             <a:r>
-              <a:rPr lang="en-US" sz="1300" dirty="0">
-                <a:solidFill>
-                  <a:srgbClr val="374151"/>
-                </a:solidFill>
+              <a:rPr lang="en-US" sz="1250" dirty="0">
+                <a:solidFill>
+                  <a:srgbClr val="23282E"/>
+                </a:solidFill>
+                <a:latin typeface="Corbel" pitchFamily="34" charset="0"/>
+                <a:ea typeface="Corbel" pitchFamily="34" charset="-122"/>
+                <a:cs typeface="Corbel" pitchFamily="34" charset="-120"/>
               </a:rPr>
               <a:t>Grounded theory: how do women come to seek or avoid repair? Theoretical sampling, constant comparison, ending in a theory of care-seeking.</a:t>
             </a:r>
-            <a:endParaRPr lang="en-US" sz="1300" dirty="0"/>
+            <a:endParaRPr lang="en-US" sz="1250" dirty="0"/>
           </a:p>
           <a:p>
             <a:pPr marL="342900" indent="-342900">
               <a:lnSpc>
-                <a:spcPct val="115000"/>
+                <a:spcPct val="120000"/>
               </a:lnSpc>
+              <a:spcAft>
+                <a:spcPts val="500"/>
+              </a:spcAft>
               <a:buSzPct val="100000"/>
               <a:buFont typeface="+mj-lt"/>
               <a:buAutoNum type="arabicPeriod" startAt="1"/>
             </a:pPr>
             <a:r>
-              <a:rPr lang="en-US" sz="1300" dirty="0">
-                <a:solidFill>
-                  <a:srgbClr val="374151"/>
-                </a:solidFill>
+              <a:rPr lang="en-US" sz="1250" dirty="0">
+                <a:solidFill>
+                  <a:srgbClr val="23282E"/>
+                </a:solidFill>
+                <a:latin typeface="Corbel" pitchFamily="34" charset="0"/>
+                <a:ea typeface="Corbel" pitchFamily="34" charset="-122"/>
+                <a:cs typeface="Corbel" pitchFamily="34" charset="-120"/>
               </a:rPr>
               <a:t>Ethnography: how does the community treat these women? Months of observation in a village, fieldnotes as primary data.</a:t>
             </a:r>
-            <a:endParaRPr lang="en-US" sz="1300" dirty="0"/>
+            <a:endParaRPr lang="en-US" sz="1250" dirty="0"/>
           </a:p>
           <a:p>
             <a:pPr marL="342900" indent="-342900">
               <a:lnSpc>
-                <a:spcPct val="115000"/>
+                <a:spcPct val="120000"/>
               </a:lnSpc>
+              <a:spcAft>
+                <a:spcPts val="500"/>
+              </a:spcAft>
               <a:buSzPct val="100000"/>
               <a:buFont typeface="+mj-lt"/>
               <a:buAutoNum type="arabicPeriod" startAt="1"/>
             </a:pPr>
             <a:r>
-              <a:rPr lang="en-US" sz="1300" dirty="0">
-                <a:solidFill>
-                  <a:srgbClr val="374151"/>
-                </a:solidFill>
+              <a:rPr lang="en-US" sz="1250" dirty="0">
+                <a:solidFill>
+                  <a:srgbClr val="23282E"/>
+                </a:solidFill>
+                <a:latin typeface="Corbel" pitchFamily="34" charset="0"/>
+                <a:ea typeface="Corbel" pitchFamily="34" charset="-122"/>
+                <a:cs typeface="Corbel" pitchFamily="34" charset="-120"/>
               </a:rPr>
               <a:t>Case study: how did one repair programme work? Interviews, records, observation and policy documents on a single bounded programme.</a:t>
             </a:r>
-            <a:endParaRPr lang="en-US" sz="1300" dirty="0"/>
+            <a:endParaRPr lang="en-US" sz="1250" dirty="0"/>
           </a:p>
           <a:p>
             <a:pPr marL="342900" indent="-342900">
               <a:lnSpc>
-                <a:spcPct val="115000"/>
+                <a:spcPct val="120000"/>
               </a:lnSpc>
+              <a:spcAft>
+                <a:spcPts val="500"/>
+              </a:spcAft>
               <a:buSzPct val="100000"/>
               <a:buFont typeface="+mj-lt"/>
               <a:buAutoNum type="arabicPeriod" startAt="1"/>
             </a:pPr>
             <a:r>
-              <a:rPr lang="en-US" sz="1300" dirty="0">
-                <a:solidFill>
-                  <a:srgbClr val="374151"/>
-                </a:solidFill>
+              <a:rPr lang="en-US" sz="1250" dirty="0">
+                <a:solidFill>
+                  <a:srgbClr val="23282E"/>
+                </a:solidFill>
+                <a:latin typeface="Corbel" pitchFamily="34" charset="0"/>
+                <a:ea typeface="Corbel" pitchFamily="34" charset="-122"/>
+                <a:cs typeface="Corbel" pitchFamily="34" charset="-120"/>
               </a:rPr>
               <a:t>Each demands its own sampling, data collection and analysis. You cannot claim one and execute another.</a:t>
             </a:r>
-            <a:endParaRPr lang="en-US" sz="1300" dirty="0"/>
+            <a:endParaRPr lang="en-US" sz="1250" dirty="0"/>
           </a:p>
         </p:txBody>
       </p:sp>
@@ -4293,8 +4553,8 @@
         </p:nvSpPr>
         <p:spPr>
           <a:xfrm>
-            <a:off x="8503920" y="4709160"/>
-            <a:ext cx="800000" cy="300000"/>
+            <a:off x="566928" y="4700016"/>
+            <a:ext cx="914400" cy="274320"/>
           </a:xfrm>
           <a:prstGeom prst="rect">
             <a:avLst/>
@@ -4309,10 +4569,13 @@
           <a:bodyPr/>
           <a:lstStyle>
             <a:lvl1pPr>
-              <a:defRPr sz="1000">
-                <a:solidFill>
-                  <a:srgbClr val="6B7280"/>
-                </a:solidFill>
+              <a:defRPr sz="900">
+                <a:solidFill>
+                  <a:srgbClr val="5F6B76"/>
+                </a:solidFill>
+                <a:latin typeface="Corbel"/>
+                <a:ea typeface="Corbel"/>
+                <a:cs typeface="Corbel"/>
               </a:defRPr>
             </a:lvl1pPr>
           </a:lstStyle>
@@ -4359,8 +4622,8 @@
         </p:nvSpPr>
         <p:spPr>
           <a:xfrm>
-            <a:off x="502920" y="292608"/>
-            <a:ext cx="8046720" cy="228600"/>
+            <a:off x="566928" y="384048"/>
+            <a:ext cx="7772400" cy="237744"/>
           </a:xfrm>
           <a:prstGeom prst="rect">
             <a:avLst/>
@@ -4376,14 +4639,17 @@
               <a:buNone/>
             </a:pPr>
             <a:r>
-              <a:rPr lang="en-US" sz="1100" b="1" spc="150" kern="0" dirty="0">
-                <a:solidFill>
-                  <a:srgbClr val="00A86B"/>
-                </a:solidFill>
+              <a:rPr lang="en-US" sz="1000" spc="200" kern="0" dirty="0">
+                <a:solidFill>
+                  <a:srgbClr val="9A6A3C"/>
+                </a:solidFill>
+                <a:latin typeface="Corbel" pitchFamily="34" charset="0"/>
+                <a:ea typeface="Corbel" pitchFamily="34" charset="-122"/>
+                <a:cs typeface="Corbel" pitchFamily="34" charset="-120"/>
               </a:rPr>
               <a:t>UNIT 6  ·  WORKED EXAMPLE</a:t>
             </a:r>
-            <a:endParaRPr lang="en-US" sz="1100" dirty="0"/>
+            <a:endParaRPr lang="en-US" sz="1000" dirty="0"/>
           </a:p>
         </p:txBody>
       </p:sp>
@@ -4395,8 +4661,8 @@
         </p:nvSpPr>
         <p:spPr>
           <a:xfrm>
-            <a:off x="502920" y="548640"/>
-            <a:ext cx="8046720" cy="566928"/>
+            <a:off x="566928" y="658368"/>
+            <a:ext cx="7772400" cy="658368"/>
           </a:xfrm>
           <a:prstGeom prst="rect">
             <a:avLst/>
@@ -4409,17 +4675,23 @@
           <a:lstStyle/>
           <a:p>
             <a:pPr indent="0" marL="0">
+              <a:lnSpc>
+                <a:spcPct val="100000"/>
+              </a:lnSpc>
               <a:buNone/>
             </a:pPr>
             <a:r>
-              <a:rPr lang="en-US" sz="2300" b="1" dirty="0">
-                <a:solidFill>
-                  <a:srgbClr val="111827"/>
-                </a:solidFill>
+              <a:rPr lang="en-US" sz="2500" dirty="0">
+                <a:solidFill>
+                  <a:srgbClr val="1C3140"/>
+                </a:solidFill>
+                <a:latin typeface="Constantia" pitchFamily="34" charset="0"/>
+                <a:ea typeface="Constantia" pitchFamily="34" charset="-122"/>
+                <a:cs typeface="Constantia" pitchFamily="34" charset="-120"/>
               </a:rPr>
               <a:t>Rewriting an interview guide that will not work</a:t>
             </a:r>
-            <a:endParaRPr lang="en-US" sz="2300" dirty="0"/>
+            <a:endParaRPr lang="en-US" sz="2500" dirty="0"/>
           </a:p>
         </p:txBody>
       </p:sp>
@@ -4431,21 +4703,16 @@
         </p:nvSpPr>
         <p:spPr>
           <a:xfrm>
-            <a:off x="502920" y="1207008"/>
-            <a:ext cx="8138160" cy="3200400"/>
+            <a:off x="566928" y="1335024"/>
+            <a:ext cx="566928" cy="20117"/>
           </a:xfrm>
           <a:prstGeom prst="rect">
             <a:avLst/>
           </a:prstGeom>
           <a:solidFill>
-            <a:srgbClr val="F3F7FC"/>
+            <a:srgbClr val="9A6A3C"/>
           </a:solidFill>
-          <a:ln w="9525">
-            <a:solidFill>
-              <a:srgbClr val="0066CC"/>
-            </a:solidFill>
-            <a:prstDash val="solid"/>
-          </a:ln>
+          <a:ln/>
         </p:spPr>
       </p:sp>
       <p:sp>
@@ -4456,8 +4723,8 @@
         </p:nvSpPr>
         <p:spPr>
           <a:xfrm>
-            <a:off x="731520" y="1371600"/>
-            <a:ext cx="7680960" cy="1005840"/>
+            <a:off x="566928" y="1645920"/>
+            <a:ext cx="8010144" cy="822960"/>
           </a:xfrm>
           <a:prstGeom prst="rect">
             <a:avLst/>
@@ -4470,137 +4737,170 @@
           <a:lstStyle/>
           <a:p>
             <a:pPr indent="0" marL="0">
+              <a:lnSpc>
+                <a:spcPct val="124000"/>
+              </a:lnSpc>
+              <a:buNone/>
+            </a:pPr>
+            <a:r>
+              <a:rPr lang="en-US" sz="1300" i="1" dirty="0">
+                <a:solidFill>
+                  <a:srgbClr val="5F6B76"/>
+                </a:solidFill>
+                <a:latin typeface="Constantia" pitchFamily="34" charset="0"/>
+                <a:ea typeface="Constantia" pitchFamily="34" charset="-122"/>
+                <a:cs typeface="Constantia" pitchFamily="34" charset="-120"/>
+              </a:rPr>
+              <a:t>A student's first interview guide opens with: "Don't you agree that the long waiting times and rude staff are the main problems at this clinic?"</a:t>
+            </a:r>
+            <a:endParaRPr lang="en-US" sz="1300" dirty="0"/>
+          </a:p>
+        </p:txBody>
+      </p:sp>
+      <p:sp>
+        <p:nvSpPr>
+          <p:cNvPr id="6" name="Text 4"/>
+          <p:cNvSpPr/>
+          <p:nvPr/>
+        </p:nvSpPr>
+        <p:spPr>
+          <a:xfrm>
+            <a:off x="786384" y="2523744"/>
+            <a:ext cx="7406640" cy="1920240"/>
+          </a:xfrm>
+          <a:prstGeom prst="rect">
+            <a:avLst/>
+          </a:prstGeom>
+          <a:noFill/>
+          <a:ln/>
+        </p:spPr>
+        <p:txBody>
+          <a:bodyPr wrap="square" rtlCol="0" anchor="t"/>
+          <a:lstStyle/>
+          <a:p>
+            <a:pPr marL="342900" indent="-342900">
               <a:lnSpc>
                 <a:spcPct val="120000"/>
               </a:lnSpc>
-              <a:buNone/>
-            </a:pPr>
-            <a:r>
-              <a:rPr lang="en-US" sz="1400" i="1" dirty="0">
-                <a:solidFill>
-                  <a:srgbClr val="374151"/>
-                </a:solidFill>
-              </a:rPr>
-              <a:t>A student's first interview guide opens with: "Don't you agree that the long waiting times and rude staff are the main problems at this clinic?"</a:t>
-            </a:r>
-            <a:endParaRPr lang="en-US" sz="1400" dirty="0"/>
-          </a:p>
-        </p:txBody>
-      </p:sp>
-      <p:sp>
-        <p:nvSpPr>
-          <p:cNvPr id="6" name="Text 4"/>
-          <p:cNvSpPr/>
-          <p:nvPr/>
-        </p:nvSpPr>
-        <p:spPr>
-          <a:xfrm>
-            <a:off x="868680" y="2395728"/>
-            <a:ext cx="7452360" cy="1920240"/>
-          </a:xfrm>
-          <a:prstGeom prst="rect">
-            <a:avLst/>
-          </a:prstGeom>
-          <a:noFill/>
-          <a:ln/>
-        </p:spPr>
-        <p:txBody>
-          <a:bodyPr wrap="square" rtlCol="0" anchor="t"/>
-          <a:lstStyle/>
-          <a:p>
-            <a:pPr marL="342900" indent="-342900">
-              <a:lnSpc>
-                <a:spcPct val="115000"/>
-              </a:lnSpc>
+              <a:spcAft>
+                <a:spcPts val="500"/>
+              </a:spcAft>
               <a:buSzPct val="100000"/>
               <a:buFont typeface="+mj-lt"/>
               <a:buAutoNum type="arabicPeriod" startAt="1"/>
             </a:pPr>
             <a:r>
-              <a:rPr lang="en-US" sz="1300" dirty="0">
-                <a:solidFill>
-                  <a:srgbClr val="374151"/>
-                </a:solidFill>
+              <a:rPr lang="en-US" sz="1250" dirty="0">
+                <a:solidFill>
+                  <a:srgbClr val="23282E"/>
+                </a:solidFill>
+                <a:latin typeface="Corbel" pitchFamily="34" charset="0"/>
+                <a:ea typeface="Corbel" pitchFamily="34" charset="-122"/>
+                <a:cs typeface="Corbel" pitchFamily="34" charset="-120"/>
               </a:rPr>
               <a:t>It is leading — it supplies the answer the interviewer expects.</a:t>
             </a:r>
-            <a:endParaRPr lang="en-US" sz="1300" dirty="0"/>
+            <a:endParaRPr lang="en-US" sz="1250" dirty="0"/>
           </a:p>
           <a:p>
             <a:pPr marL="342900" indent="-342900">
               <a:lnSpc>
-                <a:spcPct val="115000"/>
+                <a:spcPct val="120000"/>
               </a:lnSpc>
+              <a:spcAft>
+                <a:spcPts val="500"/>
+              </a:spcAft>
               <a:buSzPct val="100000"/>
               <a:buFont typeface="+mj-lt"/>
               <a:buAutoNum type="arabicPeriod" startAt="1"/>
             </a:pPr>
             <a:r>
-              <a:rPr lang="en-US" sz="1300" dirty="0">
-                <a:solidFill>
-                  <a:srgbClr val="374151"/>
-                </a:solidFill>
+              <a:rPr lang="en-US" sz="1250" dirty="0">
+                <a:solidFill>
+                  <a:srgbClr val="23282E"/>
+                </a:solidFill>
+                <a:latin typeface="Corbel" pitchFamily="34" charset="0"/>
+                <a:ea typeface="Corbel" pitchFamily="34" charset="-122"/>
+                <a:cs typeface="Corbel" pitchFamily="34" charset="-120"/>
               </a:rPr>
               <a:t>It is double-barrelled — waiting times and staff attitude are two different things.</a:t>
             </a:r>
-            <a:endParaRPr lang="en-US" sz="1300" dirty="0"/>
+            <a:endParaRPr lang="en-US" sz="1250" dirty="0"/>
           </a:p>
           <a:p>
             <a:pPr marL="342900" indent="-342900">
               <a:lnSpc>
-                <a:spcPct val="115000"/>
+                <a:spcPct val="120000"/>
               </a:lnSpc>
+              <a:spcAft>
+                <a:spcPts val="500"/>
+              </a:spcAft>
               <a:buSzPct val="100000"/>
               <a:buFont typeface="+mj-lt"/>
               <a:buAutoNum type="arabicPeriod" startAt="1"/>
             </a:pPr>
             <a:r>
-              <a:rPr lang="en-US" sz="1300" dirty="0">
-                <a:solidFill>
-                  <a:srgbClr val="374151"/>
-                </a:solidFill>
+              <a:rPr lang="en-US" sz="1250" dirty="0">
+                <a:solidFill>
+                  <a:srgbClr val="23282E"/>
+                </a:solidFill>
+                <a:latin typeface="Corbel" pitchFamily="34" charset="0"/>
+                <a:ea typeface="Corbel" pitchFamily="34" charset="-122"/>
+                <a:cs typeface="Corbel" pitchFamily="34" charset="-120"/>
               </a:rPr>
               <a:t>It is closed — it can be answered "yes", ending the topic.</a:t>
             </a:r>
-            <a:endParaRPr lang="en-US" sz="1300" dirty="0"/>
+            <a:endParaRPr lang="en-US" sz="1250" dirty="0"/>
           </a:p>
           <a:p>
             <a:pPr marL="342900" indent="-342900">
               <a:lnSpc>
-                <a:spcPct val="115000"/>
+                <a:spcPct val="120000"/>
               </a:lnSpc>
+              <a:spcAft>
+                <a:spcPts val="500"/>
+              </a:spcAft>
               <a:buSzPct val="100000"/>
               <a:buFont typeface="+mj-lt"/>
               <a:buAutoNum type="arabicPeriod" startAt="1"/>
             </a:pPr>
             <a:r>
-              <a:rPr lang="en-US" sz="1300" dirty="0">
-                <a:solidFill>
-                  <a:srgbClr val="374151"/>
-                </a:solidFill>
+              <a:rPr lang="en-US" sz="1250" dirty="0">
+                <a:solidFill>
+                  <a:srgbClr val="23282E"/>
+                </a:solidFill>
+                <a:latin typeface="Corbel" pitchFamily="34" charset="0"/>
+                <a:ea typeface="Corbel" pitchFamily="34" charset="-122"/>
+                <a:cs typeface="Corbel" pitchFamily="34" charset="-120"/>
               </a:rPr>
               <a:t>It opens on a complaint, before any rapport exists, which shapes everything that follows.</a:t>
             </a:r>
-            <a:endParaRPr lang="en-US" sz="1300" dirty="0"/>
+            <a:endParaRPr lang="en-US" sz="1250" dirty="0"/>
           </a:p>
           <a:p>
             <a:pPr marL="342900" indent="-342900">
               <a:lnSpc>
-                <a:spcPct val="115000"/>
+                <a:spcPct val="120000"/>
               </a:lnSpc>
+              <a:spcAft>
+                <a:spcPts val="500"/>
+              </a:spcAft>
               <a:buSzPct val="100000"/>
               <a:buFont typeface="+mj-lt"/>
               <a:buAutoNum type="arabicPeriod" startAt="1"/>
             </a:pPr>
             <a:r>
-              <a:rPr lang="en-US" sz="1300" dirty="0">
-                <a:solidFill>
-                  <a:srgbClr val="374151"/>
-                </a:solidFill>
+              <a:rPr lang="en-US" sz="1250" dirty="0">
+                <a:solidFill>
+                  <a:srgbClr val="23282E"/>
+                </a:solidFill>
+                <a:latin typeface="Corbel" pitchFamily="34" charset="0"/>
+                <a:ea typeface="Corbel" pitchFamily="34" charset="-122"/>
+                <a:cs typeface="Corbel" pitchFamily="34" charset="-120"/>
               </a:rPr>
               <a:t>Rewrite: "Tell me about the last time you came to this clinic. Walk me through the day." Then probe: "What was the waiting like?", "How did you find the staff?"</a:t>
             </a:r>
-            <a:endParaRPr lang="en-US" sz="1300" dirty="0"/>
+            <a:endParaRPr lang="en-US" sz="1250" dirty="0"/>
           </a:p>
         </p:txBody>
       </p:sp>
@@ -4616,8 +4916,8 @@
         </p:nvSpPr>
         <p:spPr>
           <a:xfrm>
-            <a:off x="8503920" y="4709160"/>
-            <a:ext cx="800000" cy="300000"/>
+            <a:off x="566928" y="4700016"/>
+            <a:ext cx="914400" cy="274320"/>
           </a:xfrm>
           <a:prstGeom prst="rect">
             <a:avLst/>
@@ -4632,10 +4932,13 @@
           <a:bodyPr/>
           <a:lstStyle>
             <a:lvl1pPr>
-              <a:defRPr sz="1000">
-                <a:solidFill>
-                  <a:srgbClr val="6B7280"/>
-                </a:solidFill>
+              <a:defRPr sz="900">
+                <a:solidFill>
+                  <a:srgbClr val="5F6B76"/>
+                </a:solidFill>
+                <a:latin typeface="Corbel"/>
+                <a:ea typeface="Corbel"/>
+                <a:cs typeface="Corbel"/>
               </a:defRPr>
             </a:lvl1pPr>
           </a:lstStyle>
@@ -4682,8 +4985,8 @@
         </p:nvSpPr>
         <p:spPr>
           <a:xfrm>
-            <a:off x="502920" y="292608"/>
-            <a:ext cx="8046720" cy="228600"/>
+            <a:off x="566928" y="384048"/>
+            <a:ext cx="7772400" cy="237744"/>
           </a:xfrm>
           <a:prstGeom prst="rect">
             <a:avLst/>
@@ -4699,14 +5002,17 @@
               <a:buNone/>
             </a:pPr>
             <a:r>
-              <a:rPr lang="en-US" sz="1100" b="1" spc="150" kern="0" dirty="0">
-                <a:solidFill>
-                  <a:srgbClr val="0066CC"/>
-                </a:solidFill>
+              <a:rPr lang="en-US" sz="1000" spc="200" kern="0" dirty="0">
+                <a:solidFill>
+                  <a:srgbClr val="9A6A3C"/>
+                </a:solidFill>
+                <a:latin typeface="Corbel" pitchFamily="34" charset="0"/>
+                <a:ea typeface="Corbel" pitchFamily="34" charset="-122"/>
+                <a:cs typeface="Corbel" pitchFamily="34" charset="-120"/>
               </a:rPr>
               <a:t>UNIT 6</a:t>
             </a:r>
-            <a:endParaRPr lang="en-US" sz="1100" dirty="0"/>
+            <a:endParaRPr lang="en-US" sz="1000" dirty="0"/>
           </a:p>
         </p:txBody>
       </p:sp>
@@ -4718,8 +5024,8 @@
         </p:nvSpPr>
         <p:spPr>
           <a:xfrm>
-            <a:off x="502920" y="548640"/>
-            <a:ext cx="8046720" cy="640080"/>
+            <a:off x="566928" y="658368"/>
+            <a:ext cx="7772400" cy="658368"/>
           </a:xfrm>
           <a:prstGeom prst="rect">
             <a:avLst/>
@@ -4732,30 +5038,56 @@
           <a:lstStyle/>
           <a:p>
             <a:pPr indent="0" marL="0">
+              <a:lnSpc>
+                <a:spcPct val="100000"/>
+              </a:lnSpc>
               <a:buNone/>
             </a:pPr>
             <a:r>
-              <a:rPr lang="en-US" sz="2400" b="1" dirty="0">
-                <a:solidFill>
-                  <a:srgbClr val="111827"/>
-                </a:solidFill>
+              <a:rPr lang="en-US" sz="2500" dirty="0">
+                <a:solidFill>
+                  <a:srgbClr val="1C3140"/>
+                </a:solidFill>
+                <a:latin typeface="Constantia" pitchFamily="34" charset="0"/>
+                <a:ea typeface="Constantia" pitchFamily="34" charset="-122"/>
+                <a:cs typeface="Constantia" pitchFamily="34" charset="-120"/>
               </a:rPr>
               <a:t>Key terms (1/2)</a:t>
             </a:r>
-            <a:endParaRPr lang="en-US" sz="2400" dirty="0"/>
-          </a:p>
-        </p:txBody>
-      </p:sp>
-      <p:sp>
-        <p:nvSpPr>
-          <p:cNvPr id="4" name="Text 2"/>
+            <a:endParaRPr lang="en-US" sz="2500" dirty="0"/>
+          </a:p>
+        </p:txBody>
+      </p:sp>
+      <p:sp>
+        <p:nvSpPr>
+          <p:cNvPr id="4" name="Shape 2"/>
           <p:cNvSpPr/>
           <p:nvPr/>
         </p:nvSpPr>
         <p:spPr>
           <a:xfrm>
-            <a:off x="685800" y="1325880"/>
-            <a:ext cx="7772400" cy="3200400"/>
+            <a:off x="566928" y="1335024"/>
+            <a:ext cx="566928" cy="20117"/>
+          </a:xfrm>
+          <a:prstGeom prst="rect">
+            <a:avLst/>
+          </a:prstGeom>
+          <a:solidFill>
+            <a:srgbClr val="9A6A3C"/>
+          </a:solidFill>
+          <a:ln/>
+        </p:spPr>
+      </p:sp>
+      <p:sp>
+        <p:nvSpPr>
+          <p:cNvPr id="5" name="Text 3"/>
+          <p:cNvSpPr/>
+          <p:nvPr/>
+        </p:nvSpPr>
+        <p:spPr>
+          <a:xfrm>
+            <a:off x="713232" y="1664208"/>
+            <a:ext cx="7498080" cy="2788920"/>
           </a:xfrm>
           <a:prstGeom prst="rect">
             <a:avLst/>
@@ -4769,19 +5101,22 @@
           <a:p>
             <a:pPr marL="342900" indent="-342900">
               <a:lnSpc>
-                <a:spcPct val="125000"/>
+                <a:spcPct val="130000"/>
               </a:lnSpc>
               <a:spcAft>
-                <a:spcPts val="800"/>
+                <a:spcPts val="1100"/>
               </a:spcAft>
               <a:buSzPct val="100000"/>
-              <a:buChar char="•"/>
+              <a:buChar char="–"/>
             </a:pPr>
             <a:r>
               <a:rPr lang="en-US" sz="1500" dirty="0">
                 <a:solidFill>
-                  <a:srgbClr val="374151"/>
-                </a:solidFill>
+                  <a:srgbClr val="23282E"/>
+                </a:solidFill>
+                <a:latin typeface="Corbel" pitchFamily="34" charset="0"/>
+                <a:ea typeface="Corbel" pitchFamily="34" charset="-122"/>
+                <a:cs typeface="Corbel" pitchFamily="34" charset="-120"/>
               </a:rPr>
               <a:t>Purposive sampling — Selecting participants deliberately for their capacity to inform the research question.</a:t>
             </a:r>
@@ -4790,19 +5125,22 @@
           <a:p>
             <a:pPr marL="342900" indent="-342900">
               <a:lnSpc>
-                <a:spcPct val="125000"/>
+                <a:spcPct val="130000"/>
               </a:lnSpc>
               <a:spcAft>
-                <a:spcPts val="800"/>
+                <a:spcPts val="1100"/>
               </a:spcAft>
               <a:buSzPct val="100000"/>
-              <a:buChar char="•"/>
+              <a:buChar char="–"/>
             </a:pPr>
             <a:r>
               <a:rPr lang="en-US" sz="1500" dirty="0">
                 <a:solidFill>
-                  <a:srgbClr val="374151"/>
-                </a:solidFill>
+                  <a:srgbClr val="23282E"/>
+                </a:solidFill>
+                <a:latin typeface="Corbel" pitchFamily="34" charset="0"/>
+                <a:ea typeface="Corbel" pitchFamily="34" charset="-122"/>
+                <a:cs typeface="Corbel" pitchFamily="34" charset="-120"/>
               </a:rPr>
               <a:t>Saturation — The point at which further data collection yields no new codes, categories or themes.</a:t>
             </a:r>
@@ -4811,19 +5149,22 @@
           <a:p>
             <a:pPr marL="342900" indent="-342900">
               <a:lnSpc>
-                <a:spcPct val="125000"/>
+                <a:spcPct val="130000"/>
               </a:lnSpc>
               <a:spcAft>
-                <a:spcPts val="800"/>
+                <a:spcPts val="1100"/>
               </a:spcAft>
               <a:buSzPct val="100000"/>
-              <a:buChar char="•"/>
+              <a:buChar char="–"/>
             </a:pPr>
             <a:r>
               <a:rPr lang="en-US" sz="1500" dirty="0">
                 <a:solidFill>
-                  <a:srgbClr val="374151"/>
-                </a:solidFill>
+                  <a:srgbClr val="23282E"/>
+                </a:solidFill>
+                <a:latin typeface="Corbel" pitchFamily="34" charset="0"/>
+                <a:ea typeface="Corbel" pitchFamily="34" charset="-122"/>
+                <a:cs typeface="Corbel" pitchFamily="34" charset="-120"/>
               </a:rPr>
               <a:t>Information power — The principle that the richer and more specific the sample and aim, the fewer participants are needed.</a:t>
             </a:r>
@@ -4832,19 +5173,22 @@
           <a:p>
             <a:pPr marL="342900" indent="-342900">
               <a:lnSpc>
-                <a:spcPct val="125000"/>
+                <a:spcPct val="130000"/>
               </a:lnSpc>
               <a:spcAft>
-                <a:spcPts val="800"/>
+                <a:spcPts val="1100"/>
               </a:spcAft>
               <a:buSzPct val="100000"/>
-              <a:buChar char="•"/>
+              <a:buChar char="–"/>
             </a:pPr>
             <a:r>
               <a:rPr lang="en-US" sz="1500" dirty="0">
                 <a:solidFill>
-                  <a:srgbClr val="374151"/>
-                </a:solidFill>
+                  <a:srgbClr val="23282E"/>
+                </a:solidFill>
+                <a:latin typeface="Corbel" pitchFamily="34" charset="0"/>
+                <a:ea typeface="Corbel" pitchFamily="34" charset="-122"/>
+                <a:cs typeface="Corbel" pitchFamily="34" charset="-120"/>
               </a:rPr>
               <a:t>Reflexivity — Systematic attention to how the researcher shapes and is shaped by the research.</a:t>
             </a:r>
@@ -4864,8 +5208,8 @@
         </p:nvSpPr>
         <p:spPr>
           <a:xfrm>
-            <a:off x="8503920" y="4709160"/>
-            <a:ext cx="800000" cy="300000"/>
+            <a:off x="566928" y="4700016"/>
+            <a:ext cx="914400" cy="274320"/>
           </a:xfrm>
           <a:prstGeom prst="rect">
             <a:avLst/>
@@ -4880,10 +5224,13 @@
           <a:bodyPr/>
           <a:lstStyle>
             <a:lvl1pPr>
-              <a:defRPr sz="1000">
-                <a:solidFill>
-                  <a:srgbClr val="6B7280"/>
-                </a:solidFill>
+              <a:defRPr sz="900">
+                <a:solidFill>
+                  <a:srgbClr val="5F6B76"/>
+                </a:solidFill>
+                <a:latin typeface="Corbel"/>
+                <a:ea typeface="Corbel"/>
+                <a:cs typeface="Corbel"/>
               </a:defRPr>
             </a:lvl1pPr>
           </a:lstStyle>
@@ -4930,8 +5277,8 @@
         </p:nvSpPr>
         <p:spPr>
           <a:xfrm>
-            <a:off x="502920" y="292608"/>
-            <a:ext cx="8046720" cy="228600"/>
+            <a:off x="566928" y="384048"/>
+            <a:ext cx="7772400" cy="237744"/>
           </a:xfrm>
           <a:prstGeom prst="rect">
             <a:avLst/>
@@ -4947,14 +5294,17 @@
               <a:buNone/>
             </a:pPr>
             <a:r>
-              <a:rPr lang="en-US" sz="1100" b="1" spc="150" kern="0" dirty="0">
-                <a:solidFill>
-                  <a:srgbClr val="0066CC"/>
-                </a:solidFill>
+              <a:rPr lang="en-US" sz="1000" spc="200" kern="0" dirty="0">
+                <a:solidFill>
+                  <a:srgbClr val="9A6A3C"/>
+                </a:solidFill>
+                <a:latin typeface="Corbel" pitchFamily="34" charset="0"/>
+                <a:ea typeface="Corbel" pitchFamily="34" charset="-122"/>
+                <a:cs typeface="Corbel" pitchFamily="34" charset="-120"/>
               </a:rPr>
               <a:t>UNIT 6</a:t>
             </a:r>
-            <a:endParaRPr lang="en-US" sz="1100" dirty="0"/>
+            <a:endParaRPr lang="en-US" sz="1000" dirty="0"/>
           </a:p>
         </p:txBody>
       </p:sp>
@@ -4966,8 +5316,8 @@
         </p:nvSpPr>
         <p:spPr>
           <a:xfrm>
-            <a:off x="502920" y="548640"/>
-            <a:ext cx="8046720" cy="640080"/>
+            <a:off x="566928" y="658368"/>
+            <a:ext cx="7772400" cy="658368"/>
           </a:xfrm>
           <a:prstGeom prst="rect">
             <a:avLst/>
@@ -4980,30 +5330,56 @@
           <a:lstStyle/>
           <a:p>
             <a:pPr indent="0" marL="0">
+              <a:lnSpc>
+                <a:spcPct val="100000"/>
+              </a:lnSpc>
               <a:buNone/>
             </a:pPr>
             <a:r>
-              <a:rPr lang="en-US" sz="2400" b="1" dirty="0">
-                <a:solidFill>
-                  <a:srgbClr val="111827"/>
-                </a:solidFill>
+              <a:rPr lang="en-US" sz="2500" dirty="0">
+                <a:solidFill>
+                  <a:srgbClr val="1C3140"/>
+                </a:solidFill>
+                <a:latin typeface="Constantia" pitchFamily="34" charset="0"/>
+                <a:ea typeface="Constantia" pitchFamily="34" charset="-122"/>
+                <a:cs typeface="Constantia" pitchFamily="34" charset="-120"/>
               </a:rPr>
               <a:t>Key terms (2/2)</a:t>
             </a:r>
-            <a:endParaRPr lang="en-US" sz="2400" dirty="0"/>
-          </a:p>
-        </p:txBody>
-      </p:sp>
-      <p:sp>
-        <p:nvSpPr>
-          <p:cNvPr id="4" name="Text 2"/>
+            <a:endParaRPr lang="en-US" sz="2500" dirty="0"/>
+          </a:p>
+        </p:txBody>
+      </p:sp>
+      <p:sp>
+        <p:nvSpPr>
+          <p:cNvPr id="4" name="Shape 2"/>
           <p:cNvSpPr/>
           <p:nvPr/>
         </p:nvSpPr>
         <p:spPr>
           <a:xfrm>
-            <a:off x="685800" y="1325880"/>
-            <a:ext cx="7772400" cy="3200400"/>
+            <a:off x="566928" y="1335024"/>
+            <a:ext cx="566928" cy="20117"/>
+          </a:xfrm>
+          <a:prstGeom prst="rect">
+            <a:avLst/>
+          </a:prstGeom>
+          <a:solidFill>
+            <a:srgbClr val="9A6A3C"/>
+          </a:solidFill>
+          <a:ln/>
+        </p:spPr>
+      </p:sp>
+      <p:sp>
+        <p:nvSpPr>
+          <p:cNvPr id="5" name="Text 3"/>
+          <p:cNvSpPr/>
+          <p:nvPr/>
+        </p:nvSpPr>
+        <p:spPr>
+          <a:xfrm>
+            <a:off x="713232" y="1664208"/>
+            <a:ext cx="7498080" cy="2788920"/>
           </a:xfrm>
           <a:prstGeom prst="rect">
             <a:avLst/>
@@ -5017,19 +5393,22 @@
           <a:p>
             <a:pPr marL="342900" indent="-342900">
               <a:lnSpc>
-                <a:spcPct val="125000"/>
+                <a:spcPct val="130000"/>
               </a:lnSpc>
               <a:spcAft>
-                <a:spcPts val="800"/>
+                <a:spcPts val="1100"/>
               </a:spcAft>
               <a:buSzPct val="100000"/>
-              <a:buChar char="•"/>
+              <a:buChar char="–"/>
             </a:pPr>
             <a:r>
               <a:rPr lang="en-US" sz="1500" dirty="0">
                 <a:solidFill>
-                  <a:srgbClr val="374151"/>
-                </a:solidFill>
+                  <a:srgbClr val="23282E"/>
+                </a:solidFill>
+                <a:latin typeface="Corbel" pitchFamily="34" charset="0"/>
+                <a:ea typeface="Corbel" pitchFamily="34" charset="-122"/>
+                <a:cs typeface="Corbel" pitchFamily="34" charset="-120"/>
               </a:rPr>
               <a:t>Thick description — Detailed account of context and meaning sufficient for a reader to judge transferability.</a:t>
             </a:r>
@@ -5038,19 +5417,22 @@
           <a:p>
             <a:pPr marL="342900" indent="-342900">
               <a:lnSpc>
-                <a:spcPct val="125000"/>
+                <a:spcPct val="130000"/>
               </a:lnSpc>
               <a:spcAft>
-                <a:spcPts val="800"/>
+                <a:spcPts val="1100"/>
               </a:spcAft>
               <a:buSzPct val="100000"/>
-              <a:buChar char="•"/>
+              <a:buChar char="–"/>
             </a:pPr>
             <a:r>
               <a:rPr lang="en-US" sz="1500" dirty="0">
                 <a:solidFill>
-                  <a:srgbClr val="374151"/>
-                </a:solidFill>
+                  <a:srgbClr val="23282E"/>
+                </a:solidFill>
+                <a:latin typeface="Corbel" pitchFamily="34" charset="0"/>
+                <a:ea typeface="Corbel" pitchFamily="34" charset="-122"/>
+                <a:cs typeface="Corbel" pitchFamily="34" charset="-120"/>
               </a:rPr>
               <a:t>Triangulation — Using multiple sources, methods or investigators to strengthen confidence in a finding.</a:t>
             </a:r>
@@ -5059,19 +5441,22 @@
           <a:p>
             <a:pPr marL="342900" indent="-342900">
               <a:lnSpc>
-                <a:spcPct val="125000"/>
+                <a:spcPct val="130000"/>
               </a:lnSpc>
               <a:spcAft>
-                <a:spcPts val="800"/>
+                <a:spcPts val="1100"/>
               </a:spcAft>
               <a:buSzPct val="100000"/>
-              <a:buChar char="•"/>
+              <a:buChar char="–"/>
             </a:pPr>
             <a:r>
               <a:rPr lang="en-US" sz="1500" dirty="0">
                 <a:solidFill>
-                  <a:srgbClr val="374151"/>
-                </a:solidFill>
+                  <a:srgbClr val="23282E"/>
+                </a:solidFill>
+                <a:latin typeface="Corbel" pitchFamily="34" charset="0"/>
+                <a:ea typeface="Corbel" pitchFamily="34" charset="-122"/>
+                <a:cs typeface="Corbel" pitchFamily="34" charset="-120"/>
               </a:rPr>
               <a:t>Audit trail — A documented record of decisions taken through the research, allowing the process to be followed.</a:t>
             </a:r>
@@ -5091,8 +5476,8 @@
         </p:nvSpPr>
         <p:spPr>
           <a:xfrm>
-            <a:off x="8503920" y="4709160"/>
-            <a:ext cx="800000" cy="300000"/>
+            <a:off x="566928" y="4700016"/>
+            <a:ext cx="914400" cy="274320"/>
           </a:xfrm>
           <a:prstGeom prst="rect">
             <a:avLst/>
@@ -5107,10 +5492,13 @@
           <a:bodyPr/>
           <a:lstStyle>
             <a:lvl1pPr>
-              <a:defRPr sz="1000">
-                <a:solidFill>
-                  <a:srgbClr val="6B7280"/>
-                </a:solidFill>
+              <a:defRPr sz="900">
+                <a:solidFill>
+                  <a:srgbClr val="5F6B76"/>
+                </a:solidFill>
+                <a:latin typeface="Corbel"/>
+                <a:ea typeface="Corbel"/>
+                <a:cs typeface="Corbel"/>
               </a:defRPr>
             </a:lvl1pPr>
           </a:lstStyle>
@@ -5157,8 +5545,8 @@
         </p:nvSpPr>
         <p:spPr>
           <a:xfrm>
-            <a:off x="502920" y="292608"/>
-            <a:ext cx="8046720" cy="228600"/>
+            <a:off x="685800" y="1024128"/>
+            <a:ext cx="6766560" cy="292608"/>
           </a:xfrm>
           <a:prstGeom prst="rect">
             <a:avLst/>
@@ -5174,14 +5562,17 @@
               <a:buNone/>
             </a:pPr>
             <a:r>
-              <a:rPr lang="en-US" sz="1100" b="1" spc="150" kern="0" dirty="0">
-                <a:solidFill>
-                  <a:srgbClr val="0066CC"/>
-                </a:solidFill>
-              </a:rPr>
-              <a:t>UNIT 6  ·  OVER TO YOU</a:t>
-            </a:r>
-            <a:endParaRPr lang="en-US" sz="1100" dirty="0"/>
+              <a:rPr lang="en-US" sz="1150" spc="240" kern="0" dirty="0">
+                <a:solidFill>
+                  <a:srgbClr val="C8A67B"/>
+                </a:solidFill>
+                <a:latin typeface="Corbel" pitchFamily="34" charset="0"/>
+                <a:ea typeface="Corbel" pitchFamily="34" charset="-122"/>
+                <a:cs typeface="Corbel" pitchFamily="34" charset="-120"/>
+              </a:rPr>
+              <a:t>Over to you</a:t>
+            </a:r>
+            <a:endParaRPr lang="en-US" sz="1150" dirty="0"/>
           </a:p>
         </p:txBody>
       </p:sp>
@@ -5193,8 +5584,8 @@
         </p:nvSpPr>
         <p:spPr>
           <a:xfrm>
-            <a:off x="502920" y="548640"/>
-            <a:ext cx="8046720" cy="640080"/>
+            <a:off x="685800" y="1700784"/>
+            <a:ext cx="6858000" cy="640080"/>
           </a:xfrm>
           <a:prstGeom prst="rect">
             <a:avLst/>
@@ -5210,14 +5601,17 @@
               <a:buNone/>
             </a:pPr>
             <a:r>
-              <a:rPr lang="en-US" sz="2400" b="1" dirty="0">
-                <a:solidFill>
-                  <a:srgbClr val="111827"/>
-                </a:solidFill>
+              <a:rPr lang="en-US" sz="3000" dirty="0">
+                <a:solidFill>
+                  <a:srgbClr val="FFFFFF"/>
+                </a:solidFill>
+                <a:latin typeface="Constantia" pitchFamily="34" charset="0"/>
+                <a:ea typeface="Constantia" pitchFamily="34" charset="-122"/>
+                <a:cs typeface="Constantia" pitchFamily="34" charset="-120"/>
               </a:rPr>
               <a:t>Activity</a:t>
             </a:r>
-            <a:endParaRPr lang="en-US" sz="2400" dirty="0"/>
+            <a:endParaRPr lang="en-US" sz="3000" dirty="0"/>
           </a:p>
         </p:txBody>
       </p:sp>
@@ -5229,8 +5623,8 @@
         </p:nvSpPr>
         <p:spPr>
           <a:xfrm>
-            <a:off x="685800" y="1325880"/>
-            <a:ext cx="7772400" cy="3200400"/>
+            <a:off x="685800" y="2487168"/>
+            <a:ext cx="6949440" cy="1737360"/>
           </a:xfrm>
           <a:prstGeom prst="rect">
             <a:avLst/>
@@ -5242,70 +5636,24 @@
           <a:bodyPr wrap="square" rtlCol="0" anchor="t"/>
           <a:lstStyle/>
           <a:p>
-            <a:pPr marL="342900" indent="-342900">
+            <a:pPr indent="0" marL="0">
               <a:lnSpc>
-                <a:spcPct val="125000"/>
+                <a:spcPct val="134000"/>
               </a:lnSpc>
-              <a:spcAft>
-                <a:spcPts val="800"/>
-              </a:spcAft>
-              <a:buSzPct val="100000"/>
-              <a:buChar char="•"/>
-            </a:pPr>
-            <a:r>
-              <a:rPr lang="en-US" sz="1300" dirty="0">
-                <a:solidFill>
-                  <a:srgbClr val="374151"/>
-                </a:solidFill>
+              <a:buNone/>
+            </a:pPr>
+            <a:r>
+              <a:rPr lang="en-US" sz="1450" dirty="0">
+                <a:solidFill>
+                  <a:srgbClr val="C4CCD4"/>
+                </a:solidFill>
+                <a:latin typeface="Corbel" pitchFamily="34" charset="0"/>
+                <a:ea typeface="Corbel" pitchFamily="34" charset="-122"/>
+                <a:cs typeface="Corbel" pitchFamily="34" charset="-120"/>
               </a:rPr>
               <a:t>Draft a six-question interview guide for your own topic. Swap with a partner, who must flag every leading, closed or double-barrelled question and rewrite one of them. Then role-play the first two questions and note where the guide fails in practice.</a:t>
             </a:r>
-            <a:endParaRPr lang="en-US" sz="1300" dirty="0"/>
-          </a:p>
-        </p:txBody>
-      </p:sp>
-      <p:sp>
-        <p:nvSpPr>
-          <p:cNvPr id="25" name="Slide Number Placeholder 0"/>
-          <p:cNvSpPr>
-            <a:spLocks noGrp="1"/>
-          </p:cNvSpPr>
-          <p:nvPr>
-            <p:ph type="sldNum" sz="quarter" idx="4294967295"/>
-          </p:nvPr>
-        </p:nvSpPr>
-        <p:spPr>
-          <a:xfrm>
-            <a:off x="8503920" y="4709160"/>
-            <a:ext cx="800000" cy="300000"/>
-          </a:xfrm>
-          <a:prstGeom prst="rect">
-            <a:avLst/>
-          </a:prstGeom>
-          <a:extLst>
-            <a:ext uri="{C572A759-6A51-4108-AA02-DFA0A04FC94B}">
-              <ma14:wrappingTextBoxFlag xmlns:ma14="http://schemas.microsoft.com/office/mac/drawingml/2011/main" val="0"/>
-            </a:ext>
-          </a:extLst>
-        </p:spPr>
-        <p:txBody>
-          <a:bodyPr/>
-          <a:lstStyle>
-            <a:lvl1pPr>
-              <a:defRPr sz="1000">
-                <a:solidFill>
-                  <a:srgbClr val="6B7280"/>
-                </a:solidFill>
-              </a:defRPr>
-            </a:lvl1pPr>
-          </a:lstStyle>
-          <a:p>
-            <a:pPr algn="l"/>
-            <a:fld id="{F7021451-1387-4CA6-816F-3879F97B5CBC}" type="slidenum">
-              <a:rPr b="0" lang="en-US"/>
-              <a:t>19</a:t>
-            </a:fld>
-            <a:endParaRPr lang="en-US"/>
+            <a:endParaRPr lang="en-US" sz="1450" dirty="0"/>
           </a:p>
         </p:txBody>
       </p:sp>
@@ -5342,8 +5690,8 @@
         </p:nvSpPr>
         <p:spPr>
           <a:xfrm>
-            <a:off x="502920" y="292608"/>
-            <a:ext cx="8046720" cy="228600"/>
+            <a:off x="566928" y="384048"/>
+            <a:ext cx="7772400" cy="237744"/>
           </a:xfrm>
           <a:prstGeom prst="rect">
             <a:avLst/>
@@ -5359,14 +5707,17 @@
               <a:buNone/>
             </a:pPr>
             <a:r>
-              <a:rPr lang="en-US" sz="1100" b="1" spc="150" kern="0" dirty="0">
-                <a:solidFill>
-                  <a:srgbClr val="0066CC"/>
-                </a:solidFill>
+              <a:rPr lang="en-US" sz="1000" spc="200" kern="0" dirty="0">
+                <a:solidFill>
+                  <a:srgbClr val="9A6A3C"/>
+                </a:solidFill>
+                <a:latin typeface="Corbel" pitchFamily="34" charset="0"/>
+                <a:ea typeface="Corbel" pitchFamily="34" charset="-122"/>
+                <a:cs typeface="Corbel" pitchFamily="34" charset="-120"/>
               </a:rPr>
               <a:t>UNIT 6</a:t>
             </a:r>
-            <a:endParaRPr lang="en-US" sz="1100" dirty="0"/>
+            <a:endParaRPr lang="en-US" sz="1000" dirty="0"/>
           </a:p>
         </p:txBody>
       </p:sp>
@@ -5378,8 +5729,8 @@
         </p:nvSpPr>
         <p:spPr>
           <a:xfrm>
-            <a:off x="502920" y="548640"/>
-            <a:ext cx="8046720" cy="640080"/>
+            <a:off x="566928" y="658368"/>
+            <a:ext cx="7772400" cy="658368"/>
           </a:xfrm>
           <a:prstGeom prst="rect">
             <a:avLst/>
@@ -5392,30 +5743,56 @@
           <a:lstStyle/>
           <a:p>
             <a:pPr indent="0" marL="0">
+              <a:lnSpc>
+                <a:spcPct val="100000"/>
+              </a:lnSpc>
               <a:buNone/>
             </a:pPr>
             <a:r>
-              <a:rPr lang="en-US" sz="2400" b="1" dirty="0">
-                <a:solidFill>
-                  <a:srgbClr val="111827"/>
-                </a:solidFill>
+              <a:rPr lang="en-US" sz="2500" dirty="0">
+                <a:solidFill>
+                  <a:srgbClr val="1C3140"/>
+                </a:solidFill>
+                <a:latin typeface="Constantia" pitchFamily="34" charset="0"/>
+                <a:ea typeface="Constantia" pitchFamily="34" charset="-122"/>
+                <a:cs typeface="Constantia" pitchFamily="34" charset="-120"/>
               </a:rPr>
               <a:t>What you will be able to do</a:t>
             </a:r>
-            <a:endParaRPr lang="en-US" sz="2400" dirty="0"/>
-          </a:p>
-        </p:txBody>
-      </p:sp>
-      <p:sp>
-        <p:nvSpPr>
-          <p:cNvPr id="4" name="Text 2"/>
+            <a:endParaRPr lang="en-US" sz="2500" dirty="0"/>
+          </a:p>
+        </p:txBody>
+      </p:sp>
+      <p:sp>
+        <p:nvSpPr>
+          <p:cNvPr id="4" name="Shape 2"/>
           <p:cNvSpPr/>
           <p:nvPr/>
         </p:nvSpPr>
         <p:spPr>
           <a:xfrm>
-            <a:off x="685800" y="1325880"/>
-            <a:ext cx="7772400" cy="3200400"/>
+            <a:off x="566928" y="1335024"/>
+            <a:ext cx="566928" cy="20117"/>
+          </a:xfrm>
+          <a:prstGeom prst="rect">
+            <a:avLst/>
+          </a:prstGeom>
+          <a:solidFill>
+            <a:srgbClr val="9A6A3C"/>
+          </a:solidFill>
+          <a:ln/>
+        </p:spPr>
+      </p:sp>
+      <p:sp>
+        <p:nvSpPr>
+          <p:cNvPr id="5" name="Text 3"/>
+          <p:cNvSpPr/>
+          <p:nvPr/>
+        </p:nvSpPr>
+        <p:spPr>
+          <a:xfrm>
+            <a:off x="713232" y="1664208"/>
+            <a:ext cx="7498080" cy="2788920"/>
           </a:xfrm>
           <a:prstGeom prst="rect">
             <a:avLst/>
@@ -5429,128 +5806,146 @@
           <a:p>
             <a:pPr marL="342900" indent="-342900">
               <a:lnSpc>
-                <a:spcPct val="125000"/>
+                <a:spcPct val="130000"/>
               </a:lnSpc>
               <a:spcAft>
-                <a:spcPts val="800"/>
+                <a:spcPts val="1100"/>
               </a:spcAft>
               <a:buSzPct val="100000"/>
-              <a:buChar char="•"/>
-            </a:pPr>
-            <a:r>
-              <a:rPr lang="en-US" sz="1700" dirty="0">
-                <a:solidFill>
-                  <a:srgbClr val="374151"/>
-                </a:solidFill>
+              <a:buChar char="–"/>
+            </a:pPr>
+            <a:r>
+              <a:rPr lang="en-US" sz="1650" dirty="0">
+                <a:solidFill>
+                  <a:srgbClr val="23282E"/>
+                </a:solidFill>
+                <a:latin typeface="Corbel" pitchFamily="34" charset="0"/>
+                <a:ea typeface="Corbel" pitchFamily="34" charset="-122"/>
+                <a:cs typeface="Corbel" pitchFamily="34" charset="-120"/>
               </a:rPr>
               <a:t>Distinguish phenomenology, grounded theory, ethnography, case study and narrative inquiry</a:t>
             </a:r>
-            <a:endParaRPr lang="en-US" sz="1700" dirty="0"/>
+            <a:endParaRPr lang="en-US" sz="1650" dirty="0"/>
           </a:p>
           <a:p>
             <a:pPr marL="342900" indent="-342900">
               <a:lnSpc>
-                <a:spcPct val="125000"/>
+                <a:spcPct val="130000"/>
               </a:lnSpc>
               <a:spcAft>
-                <a:spcPts val="800"/>
+                <a:spcPts val="1100"/>
               </a:spcAft>
               <a:buSzPct val="100000"/>
-              <a:buChar char="•"/>
-            </a:pPr>
-            <a:r>
-              <a:rPr lang="en-US" sz="1700" dirty="0">
-                <a:solidFill>
-                  <a:srgbClr val="374151"/>
-                </a:solidFill>
+              <a:buChar char="–"/>
+            </a:pPr>
+            <a:r>
+              <a:rPr lang="en-US" sz="1650" dirty="0">
+                <a:solidFill>
+                  <a:srgbClr val="23282E"/>
+                </a:solidFill>
+                <a:latin typeface="Corbel" pitchFamily="34" charset="0"/>
+                <a:ea typeface="Corbel" pitchFamily="34" charset="-122"/>
+                <a:cs typeface="Corbel" pitchFamily="34" charset="-120"/>
               </a:rPr>
               <a:t>Match a qualitative tradition to a research question</a:t>
             </a:r>
-            <a:endParaRPr lang="en-US" sz="1700" dirty="0"/>
+            <a:endParaRPr lang="en-US" sz="1650" dirty="0"/>
           </a:p>
           <a:p>
             <a:pPr marL="342900" indent="-342900">
               <a:lnSpc>
-                <a:spcPct val="125000"/>
+                <a:spcPct val="130000"/>
               </a:lnSpc>
               <a:spcAft>
-                <a:spcPts val="800"/>
+                <a:spcPts val="1100"/>
               </a:spcAft>
               <a:buSzPct val="100000"/>
-              <a:buChar char="•"/>
-            </a:pPr>
-            <a:r>
-              <a:rPr lang="en-US" sz="1700" dirty="0">
-                <a:solidFill>
-                  <a:srgbClr val="374151"/>
-                </a:solidFill>
+              <a:buChar char="–"/>
+            </a:pPr>
+            <a:r>
+              <a:rPr lang="en-US" sz="1650" dirty="0">
+                <a:solidFill>
+                  <a:srgbClr val="23282E"/>
+                </a:solidFill>
+                <a:latin typeface="Corbel" pitchFamily="34" charset="0"/>
+                <a:ea typeface="Corbel" pitchFamily="34" charset="-122"/>
+                <a:cs typeface="Corbel" pitchFamily="34" charset="-120"/>
               </a:rPr>
               <a:t>Design an interview guide and a focus group schedule</a:t>
             </a:r>
-            <a:endParaRPr lang="en-US" sz="1700" dirty="0"/>
+            <a:endParaRPr lang="en-US" sz="1650" dirty="0"/>
           </a:p>
           <a:p>
             <a:pPr marL="342900" indent="-342900">
               <a:lnSpc>
-                <a:spcPct val="125000"/>
+                <a:spcPct val="130000"/>
               </a:lnSpc>
               <a:spcAft>
-                <a:spcPts val="800"/>
+                <a:spcPts val="1100"/>
               </a:spcAft>
               <a:buSzPct val="100000"/>
-              <a:buChar char="•"/>
-            </a:pPr>
-            <a:r>
-              <a:rPr lang="en-US" sz="1700" dirty="0">
-                <a:solidFill>
-                  <a:srgbClr val="374151"/>
-                </a:solidFill>
+              <a:buChar char="–"/>
+            </a:pPr>
+            <a:r>
+              <a:rPr lang="en-US" sz="1650" dirty="0">
+                <a:solidFill>
+                  <a:srgbClr val="23282E"/>
+                </a:solidFill>
+                <a:latin typeface="Corbel" pitchFamily="34" charset="0"/>
+                <a:ea typeface="Corbel" pitchFamily="34" charset="-122"/>
+                <a:cs typeface="Corbel" pitchFamily="34" charset="-120"/>
               </a:rPr>
               <a:t>Explain sampling logic in qualitative work and the concept of information power</a:t>
             </a:r>
-            <a:endParaRPr lang="en-US" sz="1700" dirty="0"/>
+            <a:endParaRPr lang="en-US" sz="1650" dirty="0"/>
           </a:p>
           <a:p>
             <a:pPr marL="342900" indent="-342900">
               <a:lnSpc>
-                <a:spcPct val="125000"/>
+                <a:spcPct val="130000"/>
               </a:lnSpc>
               <a:spcAft>
-                <a:spcPts val="800"/>
+                <a:spcPts val="1100"/>
               </a:spcAft>
               <a:buSzPct val="100000"/>
-              <a:buChar char="•"/>
-            </a:pPr>
-            <a:r>
-              <a:rPr lang="en-US" sz="1700" dirty="0">
-                <a:solidFill>
-                  <a:srgbClr val="374151"/>
-                </a:solidFill>
+              <a:buChar char="–"/>
+            </a:pPr>
+            <a:r>
+              <a:rPr lang="en-US" sz="1650" dirty="0">
+                <a:solidFill>
+                  <a:srgbClr val="23282E"/>
+                </a:solidFill>
+                <a:latin typeface="Corbel" pitchFamily="34" charset="0"/>
+                <a:ea typeface="Corbel" pitchFamily="34" charset="-122"/>
+                <a:cs typeface="Corbel" pitchFamily="34" charset="-120"/>
               </a:rPr>
               <a:t>Apply the criteria of trustworthiness and explain reflexivity</a:t>
             </a:r>
-            <a:endParaRPr lang="en-US" sz="1700" dirty="0"/>
+            <a:endParaRPr lang="en-US" sz="1650" dirty="0"/>
           </a:p>
           <a:p>
             <a:pPr marL="342900" indent="-342900">
               <a:lnSpc>
-                <a:spcPct val="125000"/>
+                <a:spcPct val="130000"/>
               </a:lnSpc>
               <a:spcAft>
-                <a:spcPts val="800"/>
+                <a:spcPts val="1100"/>
               </a:spcAft>
               <a:buSzPct val="100000"/>
-              <a:buChar char="•"/>
-            </a:pPr>
-            <a:r>
-              <a:rPr lang="en-US" sz="1700" dirty="0">
-                <a:solidFill>
-                  <a:srgbClr val="374151"/>
-                </a:solidFill>
+              <a:buChar char="–"/>
+            </a:pPr>
+            <a:r>
+              <a:rPr lang="en-US" sz="1650" dirty="0">
+                <a:solidFill>
+                  <a:srgbClr val="23282E"/>
+                </a:solidFill>
+                <a:latin typeface="Corbel" pitchFamily="34" charset="0"/>
+                <a:ea typeface="Corbel" pitchFamily="34" charset="-122"/>
+                <a:cs typeface="Corbel" pitchFamily="34" charset="-120"/>
               </a:rPr>
               <a:t>Recognise when a qualitative design is the right answer and when it is an evasion</a:t>
             </a:r>
-            <a:endParaRPr lang="en-US" sz="1700" dirty="0"/>
+            <a:endParaRPr lang="en-US" sz="1650" dirty="0"/>
           </a:p>
         </p:txBody>
       </p:sp>
@@ -5566,8 +5961,8 @@
         </p:nvSpPr>
         <p:spPr>
           <a:xfrm>
-            <a:off x="8503920" y="4709160"/>
-            <a:ext cx="800000" cy="300000"/>
+            <a:off x="566928" y="4700016"/>
+            <a:ext cx="914400" cy="274320"/>
           </a:xfrm>
           <a:prstGeom prst="rect">
             <a:avLst/>
@@ -5582,10 +5977,13 @@
           <a:bodyPr/>
           <a:lstStyle>
             <a:lvl1pPr>
-              <a:defRPr sz="1000">
-                <a:solidFill>
-                  <a:srgbClr val="6B7280"/>
-                </a:solidFill>
+              <a:defRPr sz="900">
+                <a:solidFill>
+                  <a:srgbClr val="5F6B76"/>
+                </a:solidFill>
+                <a:latin typeface="Corbel"/>
+                <a:ea typeface="Corbel"/>
+                <a:cs typeface="Corbel"/>
               </a:defRPr>
             </a:lvl1pPr>
           </a:lstStyle>
@@ -5632,8 +6030,8 @@
         </p:nvSpPr>
         <p:spPr>
           <a:xfrm>
-            <a:off x="502920" y="292608"/>
-            <a:ext cx="8046720" cy="228600"/>
+            <a:off x="566928" y="384048"/>
+            <a:ext cx="7772400" cy="237744"/>
           </a:xfrm>
           <a:prstGeom prst="rect">
             <a:avLst/>
@@ -5649,14 +6047,17 @@
               <a:buNone/>
             </a:pPr>
             <a:r>
-              <a:rPr lang="en-US" sz="1100" b="1" spc="150" kern="0" dirty="0">
-                <a:solidFill>
-                  <a:srgbClr val="0066CC"/>
-                </a:solidFill>
+              <a:rPr lang="en-US" sz="1000" spc="200" kern="0" dirty="0">
+                <a:solidFill>
+                  <a:srgbClr val="9A6A3C"/>
+                </a:solidFill>
+                <a:latin typeface="Corbel" pitchFamily="34" charset="0"/>
+                <a:ea typeface="Corbel" pitchFamily="34" charset="-122"/>
+                <a:cs typeface="Corbel" pitchFamily="34" charset="-120"/>
               </a:rPr>
               <a:t>UNIT 6</a:t>
             </a:r>
-            <a:endParaRPr lang="en-US" sz="1100" dirty="0"/>
+            <a:endParaRPr lang="en-US" sz="1000" dirty="0"/>
           </a:p>
         </p:txBody>
       </p:sp>
@@ -5668,8 +6069,8 @@
         </p:nvSpPr>
         <p:spPr>
           <a:xfrm>
-            <a:off x="502920" y="548640"/>
-            <a:ext cx="8046720" cy="640080"/>
+            <a:off x="566928" y="658368"/>
+            <a:ext cx="7772400" cy="658368"/>
           </a:xfrm>
           <a:prstGeom prst="rect">
             <a:avLst/>
@@ -5682,30 +6083,56 @@
           <a:lstStyle/>
           <a:p>
             <a:pPr indent="0" marL="0">
+              <a:lnSpc>
+                <a:spcPct val="100000"/>
+              </a:lnSpc>
               <a:buNone/>
             </a:pPr>
             <a:r>
-              <a:rPr lang="en-US" sz="2400" b="1" dirty="0">
-                <a:solidFill>
-                  <a:srgbClr val="111827"/>
-                </a:solidFill>
+              <a:rPr lang="en-US" sz="2500" dirty="0">
+                <a:solidFill>
+                  <a:srgbClr val="1C3140"/>
+                </a:solidFill>
+                <a:latin typeface="Constantia" pitchFamily="34" charset="0"/>
+                <a:ea typeface="Constantia" pitchFamily="34" charset="-122"/>
+                <a:cs typeface="Constantia" pitchFamily="34" charset="-120"/>
               </a:rPr>
               <a:t>The major traditions (1/2)</a:t>
             </a:r>
-            <a:endParaRPr lang="en-US" sz="2400" dirty="0"/>
-          </a:p>
-        </p:txBody>
-      </p:sp>
-      <p:sp>
-        <p:nvSpPr>
-          <p:cNvPr id="4" name="Text 2"/>
+            <a:endParaRPr lang="en-US" sz="2500" dirty="0"/>
+          </a:p>
+        </p:txBody>
+      </p:sp>
+      <p:sp>
+        <p:nvSpPr>
+          <p:cNvPr id="4" name="Shape 2"/>
           <p:cNvSpPr/>
           <p:nvPr/>
         </p:nvSpPr>
         <p:spPr>
           <a:xfrm>
-            <a:off x="685800" y="1325880"/>
-            <a:ext cx="7772400" cy="3200400"/>
+            <a:off x="566928" y="1335024"/>
+            <a:ext cx="566928" cy="20117"/>
+          </a:xfrm>
+          <a:prstGeom prst="rect">
+            <a:avLst/>
+          </a:prstGeom>
+          <a:solidFill>
+            <a:srgbClr val="9A6A3C"/>
+          </a:solidFill>
+          <a:ln/>
+        </p:spPr>
+      </p:sp>
+      <p:sp>
+        <p:nvSpPr>
+          <p:cNvPr id="5" name="Text 3"/>
+          <p:cNvSpPr/>
+          <p:nvPr/>
+        </p:nvSpPr>
+        <p:spPr>
+          <a:xfrm>
+            <a:off x="713232" y="1664208"/>
+            <a:ext cx="7498080" cy="2788920"/>
           </a:xfrm>
           <a:prstGeom prst="rect">
             <a:avLst/>
@@ -5719,65 +6146,74 @@
           <a:p>
             <a:pPr marL="342900" indent="-342900">
               <a:lnSpc>
-                <a:spcPct val="125000"/>
+                <a:spcPct val="130000"/>
               </a:lnSpc>
               <a:spcAft>
-                <a:spcPts val="800"/>
+                <a:spcPts val="1100"/>
               </a:spcAft>
               <a:buSzPct val="100000"/>
-              <a:buChar char="•"/>
-            </a:pPr>
-            <a:r>
-              <a:rPr lang="en-US" sz="1300" dirty="0">
-                <a:solidFill>
-                  <a:srgbClr val="374151"/>
-                </a:solidFill>
+              <a:buChar char="–"/>
+            </a:pPr>
+            <a:r>
+              <a:rPr lang="en-US" sz="1350" dirty="0">
+                <a:solidFill>
+                  <a:srgbClr val="23282E"/>
+                </a:solidFill>
+                <a:latin typeface="Corbel" pitchFamily="34" charset="0"/>
+                <a:ea typeface="Corbel" pitchFamily="34" charset="-122"/>
+                <a:cs typeface="Corbel" pitchFamily="34" charset="-120"/>
               </a:rPr>
               <a:t>Phenomenology — describes the lived experience of a phenomenon; asks what it is like to live through this; small purposive samples, in-depth interviews</a:t>
             </a:r>
-            <a:endParaRPr lang="en-US" sz="1300" dirty="0"/>
+            <a:endParaRPr lang="en-US" sz="1350" dirty="0"/>
           </a:p>
           <a:p>
             <a:pPr marL="342900" indent="-342900">
               <a:lnSpc>
-                <a:spcPct val="125000"/>
+                <a:spcPct val="130000"/>
               </a:lnSpc>
               <a:spcAft>
-                <a:spcPts val="800"/>
+                <a:spcPts val="1100"/>
               </a:spcAft>
               <a:buSzPct val="100000"/>
-              <a:buChar char="•"/>
-            </a:pPr>
-            <a:r>
-              <a:rPr lang="en-US" sz="1300" dirty="0">
-                <a:solidFill>
-                  <a:srgbClr val="374151"/>
-                </a:solidFill>
+              <a:buChar char="–"/>
+            </a:pPr>
+            <a:r>
+              <a:rPr lang="en-US" sz="1350" dirty="0">
+                <a:solidFill>
+                  <a:srgbClr val="23282E"/>
+                </a:solidFill>
+                <a:latin typeface="Corbel" pitchFamily="34" charset="0"/>
+                <a:ea typeface="Corbel" pitchFamily="34" charset="-122"/>
+                <a:cs typeface="Corbel" pitchFamily="34" charset="-120"/>
               </a:rPr>
               <a:t>Grounded theory — builds theory from data through constant comparison and theoretical sampling; data collection and analysis proceed together</a:t>
             </a:r>
-            <a:endParaRPr lang="en-US" sz="1300" dirty="0"/>
+            <a:endParaRPr lang="en-US" sz="1350" dirty="0"/>
           </a:p>
           <a:p>
             <a:pPr marL="342900" indent="-342900">
               <a:lnSpc>
-                <a:spcPct val="125000"/>
+                <a:spcPct val="130000"/>
               </a:lnSpc>
               <a:spcAft>
-                <a:spcPts val="800"/>
+                <a:spcPts val="1100"/>
               </a:spcAft>
               <a:buSzPct val="100000"/>
-              <a:buChar char="•"/>
-            </a:pPr>
-            <a:r>
-              <a:rPr lang="en-US" sz="1300" dirty="0">
-                <a:solidFill>
-                  <a:srgbClr val="374151"/>
-                </a:solidFill>
+              <a:buChar char="–"/>
+            </a:pPr>
+            <a:r>
+              <a:rPr lang="en-US" sz="1350" dirty="0">
+                <a:solidFill>
+                  <a:srgbClr val="23282E"/>
+                </a:solidFill>
+                <a:latin typeface="Corbel" pitchFamily="34" charset="0"/>
+                <a:ea typeface="Corbel" pitchFamily="34" charset="-122"/>
+                <a:cs typeface="Corbel" pitchFamily="34" charset="-120"/>
               </a:rPr>
               <a:t>Ethnography — describes culture and practice through prolonged immersion and participant observation; fieldnotes are primary data</a:t>
             </a:r>
-            <a:endParaRPr lang="en-US" sz="1300" dirty="0"/>
+            <a:endParaRPr lang="en-US" sz="1350" dirty="0"/>
           </a:p>
         </p:txBody>
       </p:sp>
@@ -5793,8 +6229,8 @@
         </p:nvSpPr>
         <p:spPr>
           <a:xfrm>
-            <a:off x="8503920" y="4709160"/>
-            <a:ext cx="800000" cy="300000"/>
+            <a:off x="566928" y="4700016"/>
+            <a:ext cx="914400" cy="274320"/>
           </a:xfrm>
           <a:prstGeom prst="rect">
             <a:avLst/>
@@ -5809,10 +6245,13 @@
           <a:bodyPr/>
           <a:lstStyle>
             <a:lvl1pPr>
-              <a:defRPr sz="1000">
-                <a:solidFill>
-                  <a:srgbClr val="6B7280"/>
-                </a:solidFill>
+              <a:defRPr sz="900">
+                <a:solidFill>
+                  <a:srgbClr val="5F6B76"/>
+                </a:solidFill>
+                <a:latin typeface="Corbel"/>
+                <a:ea typeface="Corbel"/>
+                <a:cs typeface="Corbel"/>
               </a:defRPr>
             </a:lvl1pPr>
           </a:lstStyle>
@@ -5859,8 +6298,8 @@
         </p:nvSpPr>
         <p:spPr>
           <a:xfrm>
-            <a:off x="502920" y="292608"/>
-            <a:ext cx="8046720" cy="228600"/>
+            <a:off x="566928" y="384048"/>
+            <a:ext cx="7772400" cy="237744"/>
           </a:xfrm>
           <a:prstGeom prst="rect">
             <a:avLst/>
@@ -5876,14 +6315,17 @@
               <a:buNone/>
             </a:pPr>
             <a:r>
-              <a:rPr lang="en-US" sz="1100" b="1" spc="150" kern="0" dirty="0">
-                <a:solidFill>
-                  <a:srgbClr val="0066CC"/>
-                </a:solidFill>
+              <a:rPr lang="en-US" sz="1000" spc="200" kern="0" dirty="0">
+                <a:solidFill>
+                  <a:srgbClr val="9A6A3C"/>
+                </a:solidFill>
+                <a:latin typeface="Corbel" pitchFamily="34" charset="0"/>
+                <a:ea typeface="Corbel" pitchFamily="34" charset="-122"/>
+                <a:cs typeface="Corbel" pitchFamily="34" charset="-120"/>
               </a:rPr>
               <a:t>UNIT 6</a:t>
             </a:r>
-            <a:endParaRPr lang="en-US" sz="1100" dirty="0"/>
+            <a:endParaRPr lang="en-US" sz="1000" dirty="0"/>
           </a:p>
         </p:txBody>
       </p:sp>
@@ -5895,8 +6337,8 @@
         </p:nvSpPr>
         <p:spPr>
           <a:xfrm>
-            <a:off x="502920" y="548640"/>
-            <a:ext cx="8046720" cy="640080"/>
+            <a:off x="566928" y="658368"/>
+            <a:ext cx="7772400" cy="658368"/>
           </a:xfrm>
           <a:prstGeom prst="rect">
             <a:avLst/>
@@ -5909,30 +6351,56 @@
           <a:lstStyle/>
           <a:p>
             <a:pPr indent="0" marL="0">
+              <a:lnSpc>
+                <a:spcPct val="100000"/>
+              </a:lnSpc>
               <a:buNone/>
             </a:pPr>
             <a:r>
-              <a:rPr lang="en-US" sz="2400" b="1" dirty="0">
-                <a:solidFill>
-                  <a:srgbClr val="111827"/>
-                </a:solidFill>
+              <a:rPr lang="en-US" sz="2500" dirty="0">
+                <a:solidFill>
+                  <a:srgbClr val="1C3140"/>
+                </a:solidFill>
+                <a:latin typeface="Constantia" pitchFamily="34" charset="0"/>
+                <a:ea typeface="Constantia" pitchFamily="34" charset="-122"/>
+                <a:cs typeface="Constantia" pitchFamily="34" charset="-120"/>
               </a:rPr>
               <a:t>The major traditions (2/2)</a:t>
             </a:r>
-            <a:endParaRPr lang="en-US" sz="2400" dirty="0"/>
-          </a:p>
-        </p:txBody>
-      </p:sp>
-      <p:sp>
-        <p:nvSpPr>
-          <p:cNvPr id="4" name="Text 2"/>
+            <a:endParaRPr lang="en-US" sz="2500" dirty="0"/>
+          </a:p>
+        </p:txBody>
+      </p:sp>
+      <p:sp>
+        <p:nvSpPr>
+          <p:cNvPr id="4" name="Shape 2"/>
           <p:cNvSpPr/>
           <p:nvPr/>
         </p:nvSpPr>
         <p:spPr>
           <a:xfrm>
-            <a:off x="685800" y="1325880"/>
-            <a:ext cx="7772400" cy="3200400"/>
+            <a:off x="566928" y="1335024"/>
+            <a:ext cx="566928" cy="20117"/>
+          </a:xfrm>
+          <a:prstGeom prst="rect">
+            <a:avLst/>
+          </a:prstGeom>
+          <a:solidFill>
+            <a:srgbClr val="9A6A3C"/>
+          </a:solidFill>
+          <a:ln/>
+        </p:spPr>
+      </p:sp>
+      <p:sp>
+        <p:nvSpPr>
+          <p:cNvPr id="5" name="Text 3"/>
+          <p:cNvSpPr/>
+          <p:nvPr/>
+        </p:nvSpPr>
+        <p:spPr>
+          <a:xfrm>
+            <a:off x="713232" y="1664208"/>
+            <a:ext cx="7498080" cy="2788920"/>
           </a:xfrm>
           <a:prstGeom prst="rect">
             <a:avLst/>
@@ -5946,65 +6414,74 @@
           <a:p>
             <a:pPr marL="342900" indent="-342900">
               <a:lnSpc>
-                <a:spcPct val="125000"/>
+                <a:spcPct val="130000"/>
               </a:lnSpc>
               <a:spcAft>
-                <a:spcPts val="800"/>
+                <a:spcPts val="1100"/>
               </a:spcAft>
               <a:buSzPct val="100000"/>
-              <a:buChar char="•"/>
-            </a:pPr>
-            <a:r>
-              <a:rPr lang="en-US" sz="1300" dirty="0">
-                <a:solidFill>
-                  <a:srgbClr val="374151"/>
-                </a:solidFill>
+              <a:buChar char="–"/>
+            </a:pPr>
+            <a:r>
+              <a:rPr lang="en-US" sz="1350" dirty="0">
+                <a:solidFill>
+                  <a:srgbClr val="23282E"/>
+                </a:solidFill>
+                <a:latin typeface="Corbel" pitchFamily="34" charset="0"/>
+                <a:ea typeface="Corbel" pitchFamily="34" charset="-122"/>
+                <a:cs typeface="Corbel" pitchFamily="34" charset="-120"/>
               </a:rPr>
               <a:t>Case study — examines a bounded system in depth using multiple data sources; may be single or multiple case, and is strong for "how" and "why" questions</a:t>
             </a:r>
-            <a:endParaRPr lang="en-US" sz="1300" dirty="0"/>
+            <a:endParaRPr lang="en-US" sz="1350" dirty="0"/>
           </a:p>
           <a:p>
             <a:pPr marL="342900" indent="-342900">
               <a:lnSpc>
-                <a:spcPct val="125000"/>
+                <a:spcPct val="130000"/>
               </a:lnSpc>
               <a:spcAft>
-                <a:spcPts val="800"/>
+                <a:spcPts val="1100"/>
               </a:spcAft>
               <a:buSzPct val="100000"/>
-              <a:buChar char="•"/>
-            </a:pPr>
-            <a:r>
-              <a:rPr lang="en-US" sz="1300" dirty="0">
-                <a:solidFill>
-                  <a:srgbClr val="374151"/>
-                </a:solidFill>
+              <a:buChar char="–"/>
+            </a:pPr>
+            <a:r>
+              <a:rPr lang="en-US" sz="1350" dirty="0">
+                <a:solidFill>
+                  <a:srgbClr val="23282E"/>
+                </a:solidFill>
+                <a:latin typeface="Corbel" pitchFamily="34" charset="0"/>
+                <a:ea typeface="Corbel" pitchFamily="34" charset="-122"/>
+                <a:cs typeface="Corbel" pitchFamily="34" charset="-120"/>
               </a:rPr>
               <a:t>Narrative inquiry — treats the story itself as the unit of analysis, attending to how people construct accounts of their lives</a:t>
             </a:r>
-            <a:endParaRPr lang="en-US" sz="1300" dirty="0"/>
+            <a:endParaRPr lang="en-US" sz="1350" dirty="0"/>
           </a:p>
           <a:p>
             <a:pPr marL="342900" indent="-342900">
               <a:lnSpc>
-                <a:spcPct val="125000"/>
+                <a:spcPct val="130000"/>
               </a:lnSpc>
               <a:spcAft>
-                <a:spcPts val="800"/>
+                <a:spcPts val="1100"/>
               </a:spcAft>
               <a:buSzPct val="100000"/>
-              <a:buChar char="•"/>
-            </a:pPr>
-            <a:r>
-              <a:rPr lang="en-US" sz="1300" dirty="0">
-                <a:solidFill>
-                  <a:srgbClr val="374151"/>
-                </a:solidFill>
+              <a:buChar char="–"/>
+            </a:pPr>
+            <a:r>
+              <a:rPr lang="en-US" sz="1350" dirty="0">
+                <a:solidFill>
+                  <a:srgbClr val="23282E"/>
+                </a:solidFill>
+                <a:latin typeface="Corbel" pitchFamily="34" charset="0"/>
+                <a:ea typeface="Corbel" pitchFamily="34" charset="-122"/>
+                <a:cs typeface="Corbel" pitchFamily="34" charset="-120"/>
               </a:rPr>
               <a:t>Descriptive qualitative — a legitimate, atheoretical option when the aim is a straightforward account of views and experiences</a:t>
             </a:r>
-            <a:endParaRPr lang="en-US" sz="1300" dirty="0"/>
+            <a:endParaRPr lang="en-US" sz="1350" dirty="0"/>
           </a:p>
         </p:txBody>
       </p:sp>
@@ -6020,8 +6497,8 @@
         </p:nvSpPr>
         <p:spPr>
           <a:xfrm>
-            <a:off x="8503920" y="4709160"/>
-            <a:ext cx="800000" cy="300000"/>
+            <a:off x="566928" y="4700016"/>
+            <a:ext cx="914400" cy="274320"/>
           </a:xfrm>
           <a:prstGeom prst="rect">
             <a:avLst/>
@@ -6036,10 +6513,13 @@
           <a:bodyPr/>
           <a:lstStyle>
             <a:lvl1pPr>
-              <a:defRPr sz="1000">
-                <a:solidFill>
-                  <a:srgbClr val="6B7280"/>
-                </a:solidFill>
+              <a:defRPr sz="900">
+                <a:solidFill>
+                  <a:srgbClr val="5F6B76"/>
+                </a:solidFill>
+                <a:latin typeface="Corbel"/>
+                <a:ea typeface="Corbel"/>
+                <a:cs typeface="Corbel"/>
               </a:defRPr>
             </a:lvl1pPr>
           </a:lstStyle>
@@ -6086,8 +6566,8 @@
         </p:nvSpPr>
         <p:spPr>
           <a:xfrm>
-            <a:off x="502920" y="292608"/>
-            <a:ext cx="8046720" cy="228600"/>
+            <a:off x="566928" y="384048"/>
+            <a:ext cx="7772400" cy="237744"/>
           </a:xfrm>
           <a:prstGeom prst="rect">
             <a:avLst/>
@@ -6103,14 +6583,17 @@
               <a:buNone/>
             </a:pPr>
             <a:r>
-              <a:rPr lang="en-US" sz="1100" b="1" spc="150" kern="0" dirty="0">
-                <a:solidFill>
-                  <a:srgbClr val="00A86B"/>
-                </a:solidFill>
+              <a:rPr lang="en-US" sz="1000" spc="200" kern="0" dirty="0">
+                <a:solidFill>
+                  <a:srgbClr val="9A6A3C"/>
+                </a:solidFill>
+                <a:latin typeface="Corbel" pitchFamily="34" charset="0"/>
+                <a:ea typeface="Corbel" pitchFamily="34" charset="-122"/>
+                <a:cs typeface="Corbel" pitchFamily="34" charset="-120"/>
               </a:rPr>
               <a:t>UNIT 6</a:t>
             </a:r>
-            <a:endParaRPr lang="en-US" sz="1100" dirty="0"/>
+            <a:endParaRPr lang="en-US" sz="1000" dirty="0"/>
           </a:p>
         </p:txBody>
       </p:sp>
@@ -6122,8 +6605,8 @@
         </p:nvSpPr>
         <p:spPr>
           <a:xfrm>
-            <a:off x="502920" y="548640"/>
-            <a:ext cx="8046720" cy="548640"/>
+            <a:off x="566928" y="658368"/>
+            <a:ext cx="7772400" cy="658368"/>
           </a:xfrm>
           <a:prstGeom prst="rect">
             <a:avLst/>
@@ -6132,21 +6615,27 @@
           <a:ln/>
         </p:spPr>
         <p:txBody>
-          <a:bodyPr wrap="square" rtlCol="0" anchor="ctr"/>
+          <a:bodyPr wrap="square" rtlCol="0" anchor="t"/>
           <a:lstStyle/>
           <a:p>
             <a:pPr indent="0" marL="0">
+              <a:lnSpc>
+                <a:spcPct val="100000"/>
+              </a:lnSpc>
               <a:buNone/>
             </a:pPr>
             <a:r>
-              <a:rPr lang="en-US" sz="2400" b="1" dirty="0">
-                <a:solidFill>
-                  <a:srgbClr val="111827"/>
-                </a:solidFill>
+              <a:rPr lang="en-US" sz="2500" dirty="0">
+                <a:solidFill>
+                  <a:srgbClr val="1C3140"/>
+                </a:solidFill>
+                <a:latin typeface="Constantia" pitchFamily="34" charset="0"/>
+                <a:ea typeface="Constantia" pitchFamily="34" charset="-122"/>
+                <a:cs typeface="Constantia" pitchFamily="34" charset="-120"/>
               </a:rPr>
               <a:t>In practice</a:t>
             </a:r>
-            <a:endParaRPr lang="en-US" sz="2400" dirty="0"/>
+            <a:endParaRPr lang="en-US" sz="2500" dirty="0"/>
           </a:p>
         </p:txBody>
       </p:sp>
@@ -6158,28 +6647,48 @@
         </p:nvSpPr>
         <p:spPr>
           <a:xfrm>
-            <a:off x="502920" y="1280160"/>
-            <a:ext cx="54864" cy="2377440"/>
+            <a:off x="566928" y="1335024"/>
+            <a:ext cx="566928" cy="20117"/>
           </a:xfrm>
           <a:prstGeom prst="rect">
             <a:avLst/>
           </a:prstGeom>
           <a:solidFill>
-            <a:srgbClr val="00A86B"/>
+            <a:srgbClr val="9A6A3C"/>
           </a:solidFill>
           <a:ln/>
         </p:spPr>
       </p:sp>
       <p:sp>
         <p:nvSpPr>
-          <p:cNvPr id="5" name="Text 3"/>
+          <p:cNvPr id="5" name="Shape 3"/>
           <p:cNvSpPr/>
           <p:nvPr/>
         </p:nvSpPr>
         <p:spPr>
           <a:xfrm>
-            <a:off x="777240" y="1280160"/>
-            <a:ext cx="7589520" cy="2377440"/>
+            <a:off x="566928" y="1664208"/>
+            <a:ext cx="8010144" cy="2395728"/>
+          </a:xfrm>
+          <a:prstGeom prst="rect">
+            <a:avLst/>
+          </a:prstGeom>
+          <a:solidFill>
+            <a:srgbClr val="F6F4F0"/>
+          </a:solidFill>
+          <a:ln/>
+        </p:spPr>
+      </p:sp>
+      <p:sp>
+        <p:nvSpPr>
+          <p:cNvPr id="6" name="Text 4"/>
+          <p:cNvSpPr/>
+          <p:nvPr/>
+        </p:nvSpPr>
+        <p:spPr>
+          <a:xfrm>
+            <a:off x="932688" y="1847088"/>
+            <a:ext cx="7278624" cy="2029968"/>
           </a:xfrm>
           <a:prstGeom prst="rect">
             <a:avLst/>
@@ -6193,15 +6702,18 @@
           <a:p>
             <a:pPr indent="0" marL="0">
               <a:lnSpc>
-                <a:spcPct val="130000"/>
+                <a:spcPct val="132000"/>
               </a:lnSpc>
               <a:buNone/>
             </a:pPr>
             <a:r>
-              <a:rPr lang="en-US" sz="1600" dirty="0">
-                <a:solidFill>
-                  <a:srgbClr val="374151"/>
-                </a:solidFill>
+              <a:rPr lang="en-US" sz="1600" i="1" dirty="0">
+                <a:solidFill>
+                  <a:srgbClr val="1C3140"/>
+                </a:solidFill>
+                <a:latin typeface="Constantia" pitchFamily="34" charset="0"/>
+                <a:ea typeface="Constantia" pitchFamily="34" charset="-122"/>
+                <a:cs typeface="Constantia" pitchFamily="34" charset="-120"/>
               </a:rPr>
               <a:t>Choosing a tradition commits you to its sampling, data collection and analysis. Claiming grounded theory and then running six interviews with thematic analysis is a mismatch examiners look for specifically.</a:t>
             </a:r>
@@ -6221,8 +6733,8 @@
         </p:nvSpPr>
         <p:spPr>
           <a:xfrm>
-            <a:off x="8503920" y="4709160"/>
-            <a:ext cx="800000" cy="300000"/>
+            <a:off x="566928" y="4700016"/>
+            <a:ext cx="914400" cy="274320"/>
           </a:xfrm>
           <a:prstGeom prst="rect">
             <a:avLst/>
@@ -6237,10 +6749,13 @@
           <a:bodyPr/>
           <a:lstStyle>
             <a:lvl1pPr>
-              <a:defRPr sz="1000">
-                <a:solidFill>
-                  <a:srgbClr val="6B7280"/>
-                </a:solidFill>
+              <a:defRPr sz="900">
+                <a:solidFill>
+                  <a:srgbClr val="5F6B76"/>
+                </a:solidFill>
+                <a:latin typeface="Corbel"/>
+                <a:ea typeface="Corbel"/>
+                <a:cs typeface="Corbel"/>
               </a:defRPr>
             </a:lvl1pPr>
           </a:lstStyle>
@@ -6287,8 +6802,8 @@
         </p:nvSpPr>
         <p:spPr>
           <a:xfrm>
-            <a:off x="502920" y="292608"/>
-            <a:ext cx="8046720" cy="228600"/>
+            <a:off x="566928" y="384048"/>
+            <a:ext cx="7772400" cy="237744"/>
           </a:xfrm>
           <a:prstGeom prst="rect">
             <a:avLst/>
@@ -6304,14 +6819,17 @@
               <a:buNone/>
             </a:pPr>
             <a:r>
-              <a:rPr lang="en-US" sz="1100" b="1" spc="150" kern="0" dirty="0">
-                <a:solidFill>
-                  <a:srgbClr val="0066CC"/>
-                </a:solidFill>
+              <a:rPr lang="en-US" sz="1000" spc="200" kern="0" dirty="0">
+                <a:solidFill>
+                  <a:srgbClr val="9A6A3C"/>
+                </a:solidFill>
+                <a:latin typeface="Corbel" pitchFamily="34" charset="0"/>
+                <a:ea typeface="Corbel" pitchFamily="34" charset="-122"/>
+                <a:cs typeface="Corbel" pitchFamily="34" charset="-120"/>
               </a:rPr>
               <a:t>UNIT 6</a:t>
             </a:r>
-            <a:endParaRPr lang="en-US" sz="1100" dirty="0"/>
+            <a:endParaRPr lang="en-US" sz="1000" dirty="0"/>
           </a:p>
         </p:txBody>
       </p:sp>
@@ -6323,8 +6841,8 @@
         </p:nvSpPr>
         <p:spPr>
           <a:xfrm>
-            <a:off x="502920" y="548640"/>
-            <a:ext cx="8046720" cy="640080"/>
+            <a:off x="566928" y="658368"/>
+            <a:ext cx="7772400" cy="658368"/>
           </a:xfrm>
           <a:prstGeom prst="rect">
             <a:avLst/>
@@ -6337,30 +6855,56 @@
           <a:lstStyle/>
           <a:p>
             <a:pPr indent="0" marL="0">
+              <a:lnSpc>
+                <a:spcPct val="100000"/>
+              </a:lnSpc>
               <a:buNone/>
             </a:pPr>
             <a:r>
-              <a:rPr lang="en-US" sz="2400" b="1" dirty="0">
-                <a:solidFill>
-                  <a:srgbClr val="111827"/>
-                </a:solidFill>
+              <a:rPr lang="en-US" sz="2500" dirty="0">
+                <a:solidFill>
+                  <a:srgbClr val="1C3140"/>
+                </a:solidFill>
+                <a:latin typeface="Constantia" pitchFamily="34" charset="0"/>
+                <a:ea typeface="Constantia" pitchFamily="34" charset="-122"/>
+                <a:cs typeface="Constantia" pitchFamily="34" charset="-120"/>
               </a:rPr>
               <a:t>Data collection (1/2)</a:t>
             </a:r>
-            <a:endParaRPr lang="en-US" sz="2400" dirty="0"/>
-          </a:p>
-        </p:txBody>
-      </p:sp>
-      <p:sp>
-        <p:nvSpPr>
-          <p:cNvPr id="4" name="Text 2"/>
+            <a:endParaRPr lang="en-US" sz="2500" dirty="0"/>
+          </a:p>
+        </p:txBody>
+      </p:sp>
+      <p:sp>
+        <p:nvSpPr>
+          <p:cNvPr id="4" name="Shape 2"/>
           <p:cNvSpPr/>
           <p:nvPr/>
         </p:nvSpPr>
         <p:spPr>
           <a:xfrm>
-            <a:off x="685800" y="1325880"/>
-            <a:ext cx="7772400" cy="3200400"/>
+            <a:off x="566928" y="1335024"/>
+            <a:ext cx="566928" cy="20117"/>
+          </a:xfrm>
+          <a:prstGeom prst="rect">
+            <a:avLst/>
+          </a:prstGeom>
+          <a:solidFill>
+            <a:srgbClr val="9A6A3C"/>
+          </a:solidFill>
+          <a:ln/>
+        </p:spPr>
+      </p:sp>
+      <p:sp>
+        <p:nvSpPr>
+          <p:cNvPr id="5" name="Text 3"/>
+          <p:cNvSpPr/>
+          <p:nvPr/>
+        </p:nvSpPr>
+        <p:spPr>
+          <a:xfrm>
+            <a:off x="713232" y="1664208"/>
+            <a:ext cx="7498080" cy="2788920"/>
           </a:xfrm>
           <a:prstGeom prst="rect">
             <a:avLst/>
@@ -6374,19 +6918,22 @@
           <a:p>
             <a:pPr marL="342900" indent="-342900">
               <a:lnSpc>
-                <a:spcPct val="125000"/>
+                <a:spcPct val="130000"/>
               </a:lnSpc>
               <a:spcAft>
-                <a:spcPts val="800"/>
+                <a:spcPts val="1100"/>
               </a:spcAft>
               <a:buSzPct val="100000"/>
-              <a:buChar char="•"/>
+              <a:buChar char="–"/>
             </a:pPr>
             <a:r>
               <a:rPr lang="en-US" sz="1500" dirty="0">
                 <a:solidFill>
-                  <a:srgbClr val="374151"/>
-                </a:solidFill>
+                  <a:srgbClr val="23282E"/>
+                </a:solidFill>
+                <a:latin typeface="Corbel" pitchFamily="34" charset="0"/>
+                <a:ea typeface="Corbel" pitchFamily="34" charset="-122"/>
+                <a:cs typeface="Corbel" pitchFamily="34" charset="-120"/>
               </a:rPr>
               <a:t>In-depth interviews — best for sensitive topics and individual experience; typically 45-90 minutes</a:t>
             </a:r>
@@ -6395,19 +6942,22 @@
           <a:p>
             <a:pPr marL="342900" indent="-342900">
               <a:lnSpc>
-                <a:spcPct val="125000"/>
+                <a:spcPct val="130000"/>
               </a:lnSpc>
               <a:spcAft>
-                <a:spcPts val="800"/>
+                <a:spcPts val="1100"/>
               </a:spcAft>
               <a:buSzPct val="100000"/>
-              <a:buChar char="•"/>
+              <a:buChar char="–"/>
             </a:pPr>
             <a:r>
               <a:rPr lang="en-US" sz="1500" dirty="0">
                 <a:solidFill>
-                  <a:srgbClr val="374151"/>
-                </a:solidFill>
+                  <a:srgbClr val="23282E"/>
+                </a:solidFill>
+                <a:latin typeface="Corbel" pitchFamily="34" charset="0"/>
+                <a:ea typeface="Corbel" pitchFamily="34" charset="-122"/>
+                <a:cs typeface="Corbel" pitchFamily="34" charset="-120"/>
               </a:rPr>
               <a:t>Focus groups — 6-10 participants; strong for surfacing shared norms and disagreement; poor for sensitive or stigmatised topics</a:t>
             </a:r>
@@ -6416,19 +6966,22 @@
           <a:p>
             <a:pPr marL="342900" indent="-342900">
               <a:lnSpc>
-                <a:spcPct val="125000"/>
+                <a:spcPct val="130000"/>
               </a:lnSpc>
               <a:spcAft>
-                <a:spcPts val="800"/>
+                <a:spcPts val="1100"/>
               </a:spcAft>
               <a:buSzPct val="100000"/>
-              <a:buChar char="•"/>
+              <a:buChar char="–"/>
             </a:pPr>
             <a:r>
               <a:rPr lang="en-US" sz="1500" dirty="0">
                 <a:solidFill>
-                  <a:srgbClr val="374151"/>
-                </a:solidFill>
+                  <a:srgbClr val="23282E"/>
+                </a:solidFill>
+                <a:latin typeface="Corbel" pitchFamily="34" charset="0"/>
+                <a:ea typeface="Corbel" pitchFamily="34" charset="-122"/>
+                <a:cs typeface="Corbel" pitchFamily="34" charset="-120"/>
               </a:rPr>
               <a:t>Participant and non-participant observation — captures what people do rather than what they say they do</a:t>
             </a:r>
@@ -6437,19 +6990,22 @@
           <a:p>
             <a:pPr marL="342900" indent="-342900">
               <a:lnSpc>
-                <a:spcPct val="125000"/>
+                <a:spcPct val="130000"/>
               </a:lnSpc>
               <a:spcAft>
-                <a:spcPts val="800"/>
+                <a:spcPts val="1100"/>
               </a:spcAft>
               <a:buSzPct val="100000"/>
-              <a:buChar char="•"/>
+              <a:buChar char="–"/>
             </a:pPr>
             <a:r>
               <a:rPr lang="en-US" sz="1500" dirty="0">
                 <a:solidFill>
-                  <a:srgbClr val="374151"/>
-                </a:solidFill>
+                  <a:srgbClr val="23282E"/>
+                </a:solidFill>
+                <a:latin typeface="Corbel" pitchFamily="34" charset="0"/>
+                <a:ea typeface="Corbel" pitchFamily="34" charset="-122"/>
+                <a:cs typeface="Corbel" pitchFamily="34" charset="-120"/>
               </a:rPr>
               <a:t>Document analysis — policies, records, media; unobtrusive and useful for institutional questions</a:t>
             </a:r>
@@ -6469,8 +7025,8 @@
         </p:nvSpPr>
         <p:spPr>
           <a:xfrm>
-            <a:off x="8503920" y="4709160"/>
-            <a:ext cx="800000" cy="300000"/>
+            <a:off x="566928" y="4700016"/>
+            <a:ext cx="914400" cy="274320"/>
           </a:xfrm>
           <a:prstGeom prst="rect">
             <a:avLst/>
@@ -6485,10 +7041,13 @@
           <a:bodyPr/>
           <a:lstStyle>
             <a:lvl1pPr>
-              <a:defRPr sz="1000">
-                <a:solidFill>
-                  <a:srgbClr val="6B7280"/>
-                </a:solidFill>
+              <a:defRPr sz="900">
+                <a:solidFill>
+                  <a:srgbClr val="5F6B76"/>
+                </a:solidFill>
+                <a:latin typeface="Corbel"/>
+                <a:ea typeface="Corbel"/>
+                <a:cs typeface="Corbel"/>
               </a:defRPr>
             </a:lvl1pPr>
           </a:lstStyle>
@@ -6535,8 +7094,8 @@
         </p:nvSpPr>
         <p:spPr>
           <a:xfrm>
-            <a:off x="502920" y="292608"/>
-            <a:ext cx="8046720" cy="228600"/>
+            <a:off x="566928" y="384048"/>
+            <a:ext cx="7772400" cy="237744"/>
           </a:xfrm>
           <a:prstGeom prst="rect">
             <a:avLst/>
@@ -6552,14 +7111,17 @@
               <a:buNone/>
             </a:pPr>
             <a:r>
-              <a:rPr lang="en-US" sz="1100" b="1" spc="150" kern="0" dirty="0">
-                <a:solidFill>
-                  <a:srgbClr val="0066CC"/>
-                </a:solidFill>
+              <a:rPr lang="en-US" sz="1000" spc="200" kern="0" dirty="0">
+                <a:solidFill>
+                  <a:srgbClr val="9A6A3C"/>
+                </a:solidFill>
+                <a:latin typeface="Corbel" pitchFamily="34" charset="0"/>
+                <a:ea typeface="Corbel" pitchFamily="34" charset="-122"/>
+                <a:cs typeface="Corbel" pitchFamily="34" charset="-120"/>
               </a:rPr>
               <a:t>UNIT 6</a:t>
             </a:r>
-            <a:endParaRPr lang="en-US" sz="1100" dirty="0"/>
+            <a:endParaRPr lang="en-US" sz="1000" dirty="0"/>
           </a:p>
         </p:txBody>
       </p:sp>
@@ -6571,8 +7133,8 @@
         </p:nvSpPr>
         <p:spPr>
           <a:xfrm>
-            <a:off x="502920" y="548640"/>
-            <a:ext cx="8046720" cy="640080"/>
+            <a:off x="566928" y="658368"/>
+            <a:ext cx="7772400" cy="658368"/>
           </a:xfrm>
           <a:prstGeom prst="rect">
             <a:avLst/>
@@ -6585,30 +7147,56 @@
           <a:lstStyle/>
           <a:p>
             <a:pPr indent="0" marL="0">
+              <a:lnSpc>
+                <a:spcPct val="100000"/>
+              </a:lnSpc>
               <a:buNone/>
             </a:pPr>
             <a:r>
-              <a:rPr lang="en-US" sz="2400" b="1" dirty="0">
-                <a:solidFill>
-                  <a:srgbClr val="111827"/>
-                </a:solidFill>
+              <a:rPr lang="en-US" sz="2500" dirty="0">
+                <a:solidFill>
+                  <a:srgbClr val="1C3140"/>
+                </a:solidFill>
+                <a:latin typeface="Constantia" pitchFamily="34" charset="0"/>
+                <a:ea typeface="Constantia" pitchFamily="34" charset="-122"/>
+                <a:cs typeface="Constantia" pitchFamily="34" charset="-120"/>
               </a:rPr>
               <a:t>Data collection (2/2)</a:t>
             </a:r>
-            <a:endParaRPr lang="en-US" sz="2400" dirty="0"/>
-          </a:p>
-        </p:txBody>
-      </p:sp>
-      <p:sp>
-        <p:nvSpPr>
-          <p:cNvPr id="4" name="Text 2"/>
+            <a:endParaRPr lang="en-US" sz="2500" dirty="0"/>
+          </a:p>
+        </p:txBody>
+      </p:sp>
+      <p:sp>
+        <p:nvSpPr>
+          <p:cNvPr id="4" name="Shape 2"/>
           <p:cNvSpPr/>
           <p:nvPr/>
         </p:nvSpPr>
         <p:spPr>
           <a:xfrm>
-            <a:off x="685800" y="1325880"/>
-            <a:ext cx="7772400" cy="3200400"/>
+            <a:off x="566928" y="1335024"/>
+            <a:ext cx="566928" cy="20117"/>
+          </a:xfrm>
+          <a:prstGeom prst="rect">
+            <a:avLst/>
+          </a:prstGeom>
+          <a:solidFill>
+            <a:srgbClr val="9A6A3C"/>
+          </a:solidFill>
+          <a:ln/>
+        </p:spPr>
+      </p:sp>
+      <p:sp>
+        <p:nvSpPr>
+          <p:cNvPr id="5" name="Text 3"/>
+          <p:cNvSpPr/>
+          <p:nvPr/>
+        </p:nvSpPr>
+        <p:spPr>
+          <a:xfrm>
+            <a:off x="713232" y="1664208"/>
+            <a:ext cx="7498080" cy="2788920"/>
           </a:xfrm>
           <a:prstGeom prst="rect">
             <a:avLst/>
@@ -6622,44 +7210,50 @@
           <a:p>
             <a:pPr marL="342900" indent="-342900">
               <a:lnSpc>
-                <a:spcPct val="125000"/>
+                <a:spcPct val="130000"/>
               </a:lnSpc>
               <a:spcAft>
-                <a:spcPts val="800"/>
+                <a:spcPts val="1100"/>
               </a:spcAft>
               <a:buSzPct val="100000"/>
-              <a:buChar char="•"/>
-            </a:pPr>
-            <a:r>
-              <a:rPr lang="en-US" sz="1700" dirty="0">
-                <a:solidFill>
-                  <a:srgbClr val="374151"/>
-                </a:solidFill>
+              <a:buChar char="–"/>
+            </a:pPr>
+            <a:r>
+              <a:rPr lang="en-US" sz="1650" dirty="0">
+                <a:solidFill>
+                  <a:srgbClr val="23282E"/>
+                </a:solidFill>
+                <a:latin typeface="Corbel" pitchFamily="34" charset="0"/>
+                <a:ea typeface="Corbel" pitchFamily="34" charset="-122"/>
+                <a:cs typeface="Corbel" pitchFamily="34" charset="-120"/>
               </a:rPr>
               <a:t>Photovoice and participatory methods — shift some control to participants and suit community-based work</a:t>
             </a:r>
-            <a:endParaRPr lang="en-US" sz="1700" dirty="0"/>
+            <a:endParaRPr lang="en-US" sz="1650" dirty="0"/>
           </a:p>
           <a:p>
             <a:pPr marL="342900" indent="-342900">
               <a:lnSpc>
-                <a:spcPct val="125000"/>
+                <a:spcPct val="130000"/>
               </a:lnSpc>
               <a:spcAft>
-                <a:spcPts val="800"/>
+                <a:spcPts val="1100"/>
               </a:spcAft>
               <a:buSzPct val="100000"/>
-              <a:buChar char="•"/>
-            </a:pPr>
-            <a:r>
-              <a:rPr lang="en-US" sz="1700" dirty="0">
-                <a:solidFill>
-                  <a:srgbClr val="374151"/>
-                </a:solidFill>
+              <a:buChar char="–"/>
+            </a:pPr>
+            <a:r>
+              <a:rPr lang="en-US" sz="1650" dirty="0">
+                <a:solidFill>
+                  <a:srgbClr val="23282E"/>
+                </a:solidFill>
+                <a:latin typeface="Corbel" pitchFamily="34" charset="0"/>
+                <a:ea typeface="Corbel" pitchFamily="34" charset="-122"/>
+                <a:cs typeface="Corbel" pitchFamily="34" charset="-120"/>
               </a:rPr>
               <a:t>Triangulation combines sources or methods so that a finding does not rest on one type of evidence</a:t>
             </a:r>
-            <a:endParaRPr lang="en-US" sz="1700" dirty="0"/>
+            <a:endParaRPr lang="en-US" sz="1650" dirty="0"/>
           </a:p>
         </p:txBody>
       </p:sp>
@@ -6675,8 +7269,8 @@
         </p:nvSpPr>
         <p:spPr>
           <a:xfrm>
-            <a:off x="8503920" y="4709160"/>
-            <a:ext cx="800000" cy="300000"/>
+            <a:off x="566928" y="4700016"/>
+            <a:ext cx="914400" cy="274320"/>
           </a:xfrm>
           <a:prstGeom prst="rect">
             <a:avLst/>
@@ -6691,10 +7285,13 @@
           <a:bodyPr/>
           <a:lstStyle>
             <a:lvl1pPr>
-              <a:defRPr sz="1000">
-                <a:solidFill>
-                  <a:srgbClr val="6B7280"/>
-                </a:solidFill>
+              <a:defRPr sz="900">
+                <a:solidFill>
+                  <a:srgbClr val="5F6B76"/>
+                </a:solidFill>
+                <a:latin typeface="Corbel"/>
+                <a:ea typeface="Corbel"/>
+                <a:cs typeface="Corbel"/>
               </a:defRPr>
             </a:lvl1pPr>
           </a:lstStyle>
@@ -6741,8 +7338,8 @@
         </p:nvSpPr>
         <p:spPr>
           <a:xfrm>
-            <a:off x="502920" y="292608"/>
-            <a:ext cx="8046720" cy="228600"/>
+            <a:off x="566928" y="384048"/>
+            <a:ext cx="7772400" cy="237744"/>
           </a:xfrm>
           <a:prstGeom prst="rect">
             <a:avLst/>
@@ -6758,14 +7355,17 @@
               <a:buNone/>
             </a:pPr>
             <a:r>
-              <a:rPr lang="en-US" sz="1100" b="1" spc="150" kern="0" dirty="0">
-                <a:solidFill>
-                  <a:srgbClr val="0066CC"/>
-                </a:solidFill>
+              <a:rPr lang="en-US" sz="1000" spc="200" kern="0" dirty="0">
+                <a:solidFill>
+                  <a:srgbClr val="9A6A3C"/>
+                </a:solidFill>
+                <a:latin typeface="Corbel" pitchFamily="34" charset="0"/>
+                <a:ea typeface="Corbel" pitchFamily="34" charset="-122"/>
+                <a:cs typeface="Corbel" pitchFamily="34" charset="-120"/>
               </a:rPr>
               <a:t>UNIT 6</a:t>
             </a:r>
-            <a:endParaRPr lang="en-US" sz="1100" dirty="0"/>
+            <a:endParaRPr lang="en-US" sz="1000" dirty="0"/>
           </a:p>
         </p:txBody>
       </p:sp>
@@ -6777,8 +7377,8 @@
         </p:nvSpPr>
         <p:spPr>
           <a:xfrm>
-            <a:off x="502920" y="548640"/>
-            <a:ext cx="8046720" cy="640080"/>
+            <a:off x="566928" y="658368"/>
+            <a:ext cx="7772400" cy="658368"/>
           </a:xfrm>
           <a:prstGeom prst="rect">
             <a:avLst/>
@@ -6791,30 +7391,56 @@
           <a:lstStyle/>
           <a:p>
             <a:pPr indent="0" marL="0">
+              <a:lnSpc>
+                <a:spcPct val="100000"/>
+              </a:lnSpc>
               <a:buNone/>
             </a:pPr>
             <a:r>
-              <a:rPr lang="en-US" sz="2400" b="1" dirty="0">
-                <a:solidFill>
-                  <a:srgbClr val="111827"/>
-                </a:solidFill>
+              <a:rPr lang="en-US" sz="2500" dirty="0">
+                <a:solidFill>
+                  <a:srgbClr val="1C3140"/>
+                </a:solidFill>
+                <a:latin typeface="Constantia" pitchFamily="34" charset="0"/>
+                <a:ea typeface="Constantia" pitchFamily="34" charset="-122"/>
+                <a:cs typeface="Constantia" pitchFamily="34" charset="-120"/>
               </a:rPr>
               <a:t>Interview guides (1/2)</a:t>
             </a:r>
-            <a:endParaRPr lang="en-US" sz="2400" dirty="0"/>
-          </a:p>
-        </p:txBody>
-      </p:sp>
-      <p:sp>
-        <p:nvSpPr>
-          <p:cNvPr id="4" name="Text 2"/>
+            <a:endParaRPr lang="en-US" sz="2500" dirty="0"/>
+          </a:p>
+        </p:txBody>
+      </p:sp>
+      <p:sp>
+        <p:nvSpPr>
+          <p:cNvPr id="4" name="Shape 2"/>
           <p:cNvSpPr/>
           <p:nvPr/>
         </p:nvSpPr>
         <p:spPr>
           <a:xfrm>
-            <a:off x="685800" y="1325880"/>
-            <a:ext cx="7772400" cy="3200400"/>
+            <a:off x="566928" y="1335024"/>
+            <a:ext cx="566928" cy="20117"/>
+          </a:xfrm>
+          <a:prstGeom prst="rect">
+            <a:avLst/>
+          </a:prstGeom>
+          <a:solidFill>
+            <a:srgbClr val="9A6A3C"/>
+          </a:solidFill>
+          <a:ln/>
+        </p:spPr>
+      </p:sp>
+      <p:sp>
+        <p:nvSpPr>
+          <p:cNvPr id="5" name="Text 3"/>
+          <p:cNvSpPr/>
+          <p:nvPr/>
+        </p:nvSpPr>
+        <p:spPr>
+          <a:xfrm>
+            <a:off x="713232" y="1664208"/>
+            <a:ext cx="7498080" cy="2788920"/>
           </a:xfrm>
           <a:prstGeom prst="rect">
             <a:avLst/>
@@ -6828,107 +7454,122 @@
           <a:p>
             <a:pPr marL="342900" indent="-342900">
               <a:lnSpc>
-                <a:spcPct val="125000"/>
+                <a:spcPct val="130000"/>
               </a:lnSpc>
               <a:spcAft>
-                <a:spcPts val="800"/>
+                <a:spcPts val="1100"/>
               </a:spcAft>
               <a:buSzPct val="100000"/>
-              <a:buChar char="•"/>
-            </a:pPr>
-            <a:r>
-              <a:rPr lang="en-US" sz="1700" dirty="0">
-                <a:solidFill>
-                  <a:srgbClr val="374151"/>
-                </a:solidFill>
+              <a:buChar char="–"/>
+            </a:pPr>
+            <a:r>
+              <a:rPr lang="en-US" sz="1650" dirty="0">
+                <a:solidFill>
+                  <a:srgbClr val="23282E"/>
+                </a:solidFill>
+                <a:latin typeface="Corbel" pitchFamily="34" charset="0"/>
+                <a:ea typeface="Corbel" pitchFamily="34" charset="-122"/>
+                <a:cs typeface="Corbel" pitchFamily="34" charset="-120"/>
               </a:rPr>
               <a:t>Structure the guide in funnels: open broadly, then probe specifics, then close</a:t>
             </a:r>
-            <a:endParaRPr lang="en-US" sz="1700" dirty="0"/>
+            <a:endParaRPr lang="en-US" sz="1650" dirty="0"/>
           </a:p>
           <a:p>
             <a:pPr marL="342900" indent="-342900">
               <a:lnSpc>
-                <a:spcPct val="125000"/>
+                <a:spcPct val="130000"/>
               </a:lnSpc>
               <a:spcAft>
-                <a:spcPts val="800"/>
+                <a:spcPts val="1100"/>
               </a:spcAft>
               <a:buSzPct val="100000"/>
-              <a:buChar char="•"/>
-            </a:pPr>
-            <a:r>
-              <a:rPr lang="en-US" sz="1700" dirty="0">
-                <a:solidFill>
-                  <a:srgbClr val="374151"/>
-                </a:solidFill>
+              <a:buChar char="–"/>
+            </a:pPr>
+            <a:r>
+              <a:rPr lang="en-US" sz="1650" dirty="0">
+                <a:solidFill>
+                  <a:srgbClr val="23282E"/>
+                </a:solidFill>
+                <a:latin typeface="Corbel" pitchFamily="34" charset="0"/>
+                <a:ea typeface="Corbel" pitchFamily="34" charset="-122"/>
+                <a:cs typeface="Corbel" pitchFamily="34" charset="-120"/>
               </a:rPr>
               <a:t>Ask open questions — "tell me about…", "walk me through…", "what was that like?"</a:t>
             </a:r>
-            <a:endParaRPr lang="en-US" sz="1700" dirty="0"/>
+            <a:endParaRPr lang="en-US" sz="1650" dirty="0"/>
           </a:p>
           <a:p>
             <a:pPr marL="342900" indent="-342900">
               <a:lnSpc>
-                <a:spcPct val="125000"/>
+                <a:spcPct val="130000"/>
               </a:lnSpc>
               <a:spcAft>
-                <a:spcPts val="800"/>
+                <a:spcPts val="1100"/>
               </a:spcAft>
               <a:buSzPct val="100000"/>
-              <a:buChar char="•"/>
-            </a:pPr>
-            <a:r>
-              <a:rPr lang="en-US" sz="1700" dirty="0">
-                <a:solidFill>
-                  <a:srgbClr val="374151"/>
-                </a:solidFill>
+              <a:buChar char="–"/>
+            </a:pPr>
+            <a:r>
+              <a:rPr lang="en-US" sz="1650" dirty="0">
+                <a:solidFill>
+                  <a:srgbClr val="23282E"/>
+                </a:solidFill>
+                <a:latin typeface="Corbel" pitchFamily="34" charset="0"/>
+                <a:ea typeface="Corbel" pitchFamily="34" charset="-122"/>
+                <a:cs typeface="Corbel" pitchFamily="34" charset="-120"/>
               </a:rPr>
               <a:t>Avoid leading questions, double-barrelled questions and jargon</a:t>
             </a:r>
-            <a:endParaRPr lang="en-US" sz="1700" dirty="0"/>
+            <a:endParaRPr lang="en-US" sz="1650" dirty="0"/>
           </a:p>
           <a:p>
             <a:pPr marL="342900" indent="-342900">
               <a:lnSpc>
-                <a:spcPct val="125000"/>
+                <a:spcPct val="130000"/>
               </a:lnSpc>
               <a:spcAft>
-                <a:spcPts val="800"/>
+                <a:spcPts val="1100"/>
               </a:spcAft>
               <a:buSzPct val="100000"/>
-              <a:buChar char="•"/>
-            </a:pPr>
-            <a:r>
-              <a:rPr lang="en-US" sz="1700" dirty="0">
-                <a:solidFill>
-                  <a:srgbClr val="374151"/>
-                </a:solidFill>
+              <a:buChar char="–"/>
+            </a:pPr>
+            <a:r>
+              <a:rPr lang="en-US" sz="1650" dirty="0">
+                <a:solidFill>
+                  <a:srgbClr val="23282E"/>
+                </a:solidFill>
+                <a:latin typeface="Corbel" pitchFamily="34" charset="0"/>
+                <a:ea typeface="Corbel" pitchFamily="34" charset="-122"/>
+                <a:cs typeface="Corbel" pitchFamily="34" charset="-120"/>
               </a:rPr>
               <a:t>Plan probes in advance: "can you say more?", "what happened next?", "can you give an example?"</a:t>
             </a:r>
-            <a:endParaRPr lang="en-US" sz="1700" dirty="0"/>
+            <a:endParaRPr lang="en-US" sz="1650" dirty="0"/>
           </a:p>
           <a:p>
             <a:pPr marL="342900" indent="-342900">
               <a:lnSpc>
-                <a:spcPct val="125000"/>
+                <a:spcPct val="130000"/>
               </a:lnSpc>
               <a:spcAft>
-                <a:spcPts val="800"/>
+                <a:spcPts val="1100"/>
               </a:spcAft>
               <a:buSzPct val="100000"/>
-              <a:buChar char="•"/>
-            </a:pPr>
-            <a:r>
-              <a:rPr lang="en-US" sz="1700" dirty="0">
-                <a:solidFill>
-                  <a:srgbClr val="374151"/>
-                </a:solidFill>
+              <a:buChar char="–"/>
+            </a:pPr>
+            <a:r>
+              <a:rPr lang="en-US" sz="1650" dirty="0">
+                <a:solidFill>
+                  <a:srgbClr val="23282E"/>
+                </a:solidFill>
+                <a:latin typeface="Corbel" pitchFamily="34" charset="0"/>
+                <a:ea typeface="Corbel" pitchFamily="34" charset="-122"/>
+                <a:cs typeface="Corbel" pitchFamily="34" charset="-120"/>
               </a:rPr>
               <a:t>Six to ten main questions is usually enough for a 60-minute interview</a:t>
             </a:r>
-            <a:endParaRPr lang="en-US" sz="1700" dirty="0"/>
+            <a:endParaRPr lang="en-US" sz="1650" dirty="0"/>
           </a:p>
         </p:txBody>
       </p:sp>
@@ -6944,8 +7585,8 @@
         </p:nvSpPr>
         <p:spPr>
           <a:xfrm>
-            <a:off x="8503920" y="4709160"/>
-            <a:ext cx="800000" cy="300000"/>
+            <a:off x="566928" y="4700016"/>
+            <a:ext cx="914400" cy="274320"/>
           </a:xfrm>
           <a:prstGeom prst="rect">
             <a:avLst/>
@@ -6960,10 +7601,13 @@
           <a:bodyPr/>
           <a:lstStyle>
             <a:lvl1pPr>
-              <a:defRPr sz="1000">
-                <a:solidFill>
-                  <a:srgbClr val="6B7280"/>
-                </a:solidFill>
+              <a:defRPr sz="900">
+                <a:solidFill>
+                  <a:srgbClr val="5F6B76"/>
+                </a:solidFill>
+                <a:latin typeface="Corbel"/>
+                <a:ea typeface="Corbel"/>
+                <a:cs typeface="Corbel"/>
               </a:defRPr>
             </a:lvl1pPr>
           </a:lstStyle>
@@ -7010,8 +7654,8 @@
         </p:nvSpPr>
         <p:spPr>
           <a:xfrm>
-            <a:off x="502920" y="292608"/>
-            <a:ext cx="8046720" cy="228600"/>
+            <a:off x="566928" y="384048"/>
+            <a:ext cx="7772400" cy="237744"/>
           </a:xfrm>
           <a:prstGeom prst="rect">
             <a:avLst/>
@@ -7027,14 +7671,17 @@
               <a:buNone/>
             </a:pPr>
             <a:r>
-              <a:rPr lang="en-US" sz="1100" b="1" spc="150" kern="0" dirty="0">
-                <a:solidFill>
-                  <a:srgbClr val="0066CC"/>
-                </a:solidFill>
+              <a:rPr lang="en-US" sz="1000" spc="200" kern="0" dirty="0">
+                <a:solidFill>
+                  <a:srgbClr val="9A6A3C"/>
+                </a:solidFill>
+                <a:latin typeface="Corbel" pitchFamily="34" charset="0"/>
+                <a:ea typeface="Corbel" pitchFamily="34" charset="-122"/>
+                <a:cs typeface="Corbel" pitchFamily="34" charset="-120"/>
               </a:rPr>
               <a:t>UNIT 6</a:t>
             </a:r>
-            <a:endParaRPr lang="en-US" sz="1100" dirty="0"/>
+            <a:endParaRPr lang="en-US" sz="1000" dirty="0"/>
           </a:p>
         </p:txBody>
       </p:sp>
@@ -7046,8 +7693,8 @@
         </p:nvSpPr>
         <p:spPr>
           <a:xfrm>
-            <a:off x="502920" y="548640"/>
-            <a:ext cx="8046720" cy="640080"/>
+            <a:off x="566928" y="658368"/>
+            <a:ext cx="7772400" cy="658368"/>
           </a:xfrm>
           <a:prstGeom prst="rect">
             <a:avLst/>
@@ -7060,30 +7707,56 @@
           <a:lstStyle/>
           <a:p>
             <a:pPr indent="0" marL="0">
+              <a:lnSpc>
+                <a:spcPct val="100000"/>
+              </a:lnSpc>
               <a:buNone/>
             </a:pPr>
             <a:r>
-              <a:rPr lang="en-US" sz="2400" b="1" dirty="0">
-                <a:solidFill>
-                  <a:srgbClr val="111827"/>
-                </a:solidFill>
+              <a:rPr lang="en-US" sz="2500" dirty="0">
+                <a:solidFill>
+                  <a:srgbClr val="1C3140"/>
+                </a:solidFill>
+                <a:latin typeface="Constantia" pitchFamily="34" charset="0"/>
+                <a:ea typeface="Constantia" pitchFamily="34" charset="-122"/>
+                <a:cs typeface="Constantia" pitchFamily="34" charset="-120"/>
               </a:rPr>
               <a:t>Interview guides (2/2)</a:t>
             </a:r>
-            <a:endParaRPr lang="en-US" sz="2400" dirty="0"/>
-          </a:p>
-        </p:txBody>
-      </p:sp>
-      <p:sp>
-        <p:nvSpPr>
-          <p:cNvPr id="4" name="Text 2"/>
+            <a:endParaRPr lang="en-US" sz="2500" dirty="0"/>
+          </a:p>
+        </p:txBody>
+      </p:sp>
+      <p:sp>
+        <p:nvSpPr>
+          <p:cNvPr id="4" name="Shape 2"/>
           <p:cNvSpPr/>
           <p:nvPr/>
         </p:nvSpPr>
         <p:spPr>
           <a:xfrm>
-            <a:off x="685800" y="1325880"/>
-            <a:ext cx="7772400" cy="3200400"/>
+            <a:off x="566928" y="1335024"/>
+            <a:ext cx="566928" cy="20117"/>
+          </a:xfrm>
+          <a:prstGeom prst="rect">
+            <a:avLst/>
+          </a:prstGeom>
+          <a:solidFill>
+            <a:srgbClr val="9A6A3C"/>
+          </a:solidFill>
+          <a:ln/>
+        </p:spPr>
+      </p:sp>
+      <p:sp>
+        <p:nvSpPr>
+          <p:cNvPr id="5" name="Text 3"/>
+          <p:cNvSpPr/>
+          <p:nvPr/>
+        </p:nvSpPr>
+        <p:spPr>
+          <a:xfrm>
+            <a:off x="713232" y="1664208"/>
+            <a:ext cx="7498080" cy="2788920"/>
           </a:xfrm>
           <a:prstGeom prst="rect">
             <a:avLst/>
@@ -7097,44 +7770,50 @@
           <a:p>
             <a:pPr marL="342900" indent="-342900">
               <a:lnSpc>
-                <a:spcPct val="125000"/>
+                <a:spcPct val="130000"/>
               </a:lnSpc>
               <a:spcAft>
-                <a:spcPts val="800"/>
+                <a:spcPts val="1100"/>
               </a:spcAft>
               <a:buSzPct val="100000"/>
-              <a:buChar char="•"/>
-            </a:pPr>
-            <a:r>
-              <a:rPr lang="en-US" sz="1700" dirty="0">
-                <a:solidFill>
-                  <a:srgbClr val="374151"/>
-                </a:solidFill>
+              <a:buChar char="–"/>
+            </a:pPr>
+            <a:r>
+              <a:rPr lang="en-US" sz="1650" dirty="0">
+                <a:solidFill>
+                  <a:srgbClr val="23282E"/>
+                </a:solidFill>
+                <a:latin typeface="Corbel" pitchFamily="34" charset="0"/>
+                <a:ea typeface="Corbel" pitchFamily="34" charset="-122"/>
+                <a:cs typeface="Corbel" pitchFamily="34" charset="-120"/>
               </a:rPr>
               <a:t>Pilot the guide and expect to revise it — this is a strength, not a failure</a:t>
             </a:r>
-            <a:endParaRPr lang="en-US" sz="1700" dirty="0"/>
+            <a:endParaRPr lang="en-US" sz="1650" dirty="0"/>
           </a:p>
           <a:p>
             <a:pPr marL="342900" indent="-342900">
               <a:lnSpc>
-                <a:spcPct val="125000"/>
+                <a:spcPct val="130000"/>
               </a:lnSpc>
               <a:spcAft>
-                <a:spcPts val="800"/>
+                <a:spcPts val="1100"/>
               </a:spcAft>
               <a:buSzPct val="100000"/>
-              <a:buChar char="•"/>
-            </a:pPr>
-            <a:r>
-              <a:rPr lang="en-US" sz="1700" dirty="0">
-                <a:solidFill>
-                  <a:srgbClr val="374151"/>
-                </a:solidFill>
+              <a:buChar char="–"/>
+            </a:pPr>
+            <a:r>
+              <a:rPr lang="en-US" sz="1650" dirty="0">
+                <a:solidFill>
+                  <a:srgbClr val="23282E"/>
+                </a:solidFill>
+                <a:latin typeface="Corbel" pitchFamily="34" charset="0"/>
+                <a:ea typeface="Corbel" pitchFamily="34" charset="-122"/>
+                <a:cs typeface="Corbel" pitchFamily="34" charset="-120"/>
               </a:rPr>
               <a:t>In focus groups, plan how you will manage a dominant speaker and draw out quiet participants</a:t>
             </a:r>
-            <a:endParaRPr lang="en-US" sz="1700" dirty="0"/>
+            <a:endParaRPr lang="en-US" sz="1650" dirty="0"/>
           </a:p>
         </p:txBody>
       </p:sp>
@@ -7150,8 +7829,8 @@
         </p:nvSpPr>
         <p:spPr>
           <a:xfrm>
-            <a:off x="8503920" y="4709160"/>
-            <a:ext cx="800000" cy="300000"/>
+            <a:off x="566928" y="4700016"/>
+            <a:ext cx="914400" cy="274320"/>
           </a:xfrm>
           <a:prstGeom prst="rect">
             <a:avLst/>
@@ -7166,10 +7845,13 @@
           <a:bodyPr/>
           <a:lstStyle>
             <a:lvl1pPr>
-              <a:defRPr sz="1000">
-                <a:solidFill>
-                  <a:srgbClr val="6B7280"/>
-                </a:solidFill>
+              <a:defRPr sz="900">
+                <a:solidFill>
+                  <a:srgbClr val="5F6B76"/>
+                </a:solidFill>
+                <a:latin typeface="Corbel"/>
+                <a:ea typeface="Corbel"/>
+                <a:cs typeface="Corbel"/>
               </a:defRPr>
             </a:lvl1pPr>
           </a:lstStyle>
@@ -7234,7 +7916,7 @@
     </a:clrScheme>
     <a:fontScheme name="Office">
       <a:majorFont>
-        <a:latin typeface="Calibri Light" panose="020F0302020204030204"/>
+        <a:latin typeface="Constantia"/>
         <a:ea typeface=""/>
         <a:cs typeface=""/>
         <a:font script="Jpan" typeface="游ゴシック Light"/>
@@ -7286,7 +7968,7 @@
         <a:font script="Tfng" typeface="Ebrima"/>
       </a:majorFont>
       <a:minorFont>
-        <a:latin typeface="Calibri" panose="020F0502020204030204"/>
+        <a:latin typeface="Corbel"/>
         <a:ea typeface=""/>
         <a:cs typeface=""/>
         <a:font script="Jpan" typeface="游ゴシック"/>
